--- a/examples/preview/subjects/数学.pptx
+++ b/examples/preview/subjects/数学.pptx
@@ -3162,7 +3162,7 @@
             <a:avLst/>
           </a:prstGeom>
           <a:solidFill>
-            <a:srgbClr val="E4EBF7"/>
+            <a:srgbClr val="EAF0FA"/>
           </a:solidFill>
           <a:ln>
             <a:noFill/>
@@ -3206,7 +3206,7 @@
             <a:avLst/>
           </a:prstGeom>
           <a:solidFill>
-            <a:srgbClr val="E4EBF7"/>
+            <a:srgbClr val="EAF0FA"/>
           </a:solidFill>
           <a:ln>
             <a:noFill/>
@@ -3250,7 +3250,7 @@
             <a:avLst/>
           </a:prstGeom>
           <a:solidFill>
-            <a:srgbClr val="E4EBF7"/>
+            <a:srgbClr val="EAF0FA"/>
           </a:solidFill>
           <a:ln>
             <a:noFill/>
@@ -3294,7 +3294,7 @@
             <a:avLst/>
           </a:prstGeom>
           <a:solidFill>
-            <a:srgbClr val="E4EBF7"/>
+            <a:srgbClr val="EAF0FA"/>
           </a:solidFill>
           <a:ln>
             <a:noFill/>
@@ -3338,7 +3338,7 @@
             <a:avLst/>
           </a:prstGeom>
           <a:solidFill>
-            <a:srgbClr val="E4EBF7"/>
+            <a:srgbClr val="EAF0FA"/>
           </a:solidFill>
           <a:ln>
             <a:noFill/>
@@ -3382,7 +3382,7 @@
             <a:avLst/>
           </a:prstGeom>
           <a:solidFill>
-            <a:srgbClr val="E4EBF7"/>
+            <a:srgbClr val="EAF0FA"/>
           </a:solidFill>
           <a:ln>
             <a:noFill/>
@@ -3426,7 +3426,7 @@
             <a:avLst/>
           </a:prstGeom>
           <a:solidFill>
-            <a:srgbClr val="E4EBF7"/>
+            <a:srgbClr val="EAF0FA"/>
           </a:solidFill>
           <a:ln>
             <a:noFill/>
@@ -3470,7 +3470,7 @@
             <a:avLst/>
           </a:prstGeom>
           <a:solidFill>
-            <a:srgbClr val="E4EBF7"/>
+            <a:srgbClr val="EAF0FA"/>
           </a:solidFill>
           <a:ln>
             <a:noFill/>
@@ -3514,7 +3514,7 @@
             <a:avLst/>
           </a:prstGeom>
           <a:solidFill>
-            <a:srgbClr val="E4EBF7"/>
+            <a:srgbClr val="EAF0FA"/>
           </a:solidFill>
           <a:ln>
             <a:noFill/>
@@ -3552,13 +3552,13 @@
         <p:spPr>
           <a:xfrm>
             <a:off x="0" y="0"/>
-            <a:ext cx="128016" cy="6858000"/>
-          </a:xfrm>
-          <a:prstGeom prst="rect">
-            <a:avLst/>
-          </a:prstGeom>
-          <a:solidFill>
-            <a:srgbClr val="0B1F3A"/>
+            <a:ext cx="12191695" cy="91440"/>
+          </a:xfrm>
+          <a:prstGeom prst="rect">
+            <a:avLst/>
+          </a:prstGeom>
+          <a:solidFill>
+            <a:srgbClr val="1F3864"/>
           </a:solidFill>
           <a:ln>
             <a:noFill/>
@@ -3589,23 +3589,27 @@
       </p:sp>
       <p:sp>
         <p:nvSpPr>
-          <p:cNvPr id="13" name="Rectangle 12"/>
+          <p:cNvPr id="13" name="Rounded Rectangle 12"/>
           <p:cNvSpPr/>
           <p:nvPr/>
         </p:nvSpPr>
         <p:spPr>
           <a:xfrm>
-            <a:off x="0" y="0"/>
-            <a:ext cx="12191695" cy="91440"/>
-          </a:xfrm>
-          <a:prstGeom prst="rect">
-            <a:avLst/>
-          </a:prstGeom>
-          <a:solidFill>
-            <a:srgbClr val="0B1F3A"/>
-          </a:solidFill>
-          <a:ln>
-            <a:noFill/>
+            <a:off x="1280160" y="1234440"/>
+            <a:ext cx="9631375" cy="2286000"/>
+          </a:xfrm>
+          <a:prstGeom prst="roundRect">
+            <a:avLst>
+              <a:gd name="adj" fmla="val 6000"/>
+            </a:avLst>
+          </a:prstGeom>
+          <a:solidFill>
+            <a:srgbClr val="FFFFFF"/>
+          </a:solidFill>
+          <a:ln w="19050">
+            <a:solidFill>
+              <a:srgbClr val="2F6FED"/>
+            </a:solidFill>
           </a:ln>
           <a:effectLst/>
         </p:spPr>
@@ -3639,8 +3643,49 @@
         </p:nvSpPr>
         <p:spPr>
           <a:xfrm>
-            <a:off x="868680" y="1828800"/>
-            <a:ext cx="7071183" cy="2011680"/>
+            <a:off x="1554480" y="2057400"/>
+            <a:ext cx="9082735" cy="1371600"/>
+          </a:xfrm>
+          <a:prstGeom prst="rect">
+            <a:avLst/>
+          </a:prstGeom>
+          <a:noFill/>
+        </p:spPr>
+        <p:txBody>
+          <a:bodyPr wrap="square" anchor="ctr" lIns="54864" rIns="54864" tIns="0" bIns="0">
+            <a:spAutoFit/>
+          </a:bodyPr>
+          <a:lstStyle/>
+          <a:p>
+            <a:pPr algn="ctr">
+              <a:lnSpc>
+                <a:spcPct val="122000"/>
+              </a:lnSpc>
+              <a:defRPr sz="3100"/>
+            </a:pPr>
+            <a:r>
+              <a:rPr sz="3100" b="1" u="none">
+                <a:solidFill>
+                  <a:srgbClr val="1F3864"/>
+                </a:solidFill>
+                <a:latin typeface="Times New Roman"/>
+                <a:ea typeface="Noto Serif CJK SC"/>
+              </a:rPr>
+              <a:t>第4节 函数的对称性及应用</a:t>
+            </a:r>
+          </a:p>
+        </p:txBody>
+      </p:sp>
+      <p:sp>
+        <p:nvSpPr>
+          <p:cNvPr id="15" name="TextBox 14"/>
+          <p:cNvSpPr txBox="1"/>
+          <p:nvPr/>
+        </p:nvSpPr>
+        <p:spPr>
+          <a:xfrm>
+            <a:off x="1280160" y="3794760"/>
+            <a:ext cx="9631375" cy="640080"/>
           </a:xfrm>
           <a:prstGeom prst="rect">
             <a:avLst/>
@@ -3653,44 +3698,48 @@
           </a:bodyPr>
           <a:lstStyle/>
           <a:p>
-            <a:pPr algn="l">
+            <a:pPr algn="ctr">
               <a:lnSpc>
-                <a:spcPct val="120000"/>
+                <a:spcPct val="130000"/>
               </a:lnSpc>
-              <a:defRPr sz="3100"/>
+              <a:defRPr sz="2000"/>
             </a:pPr>
             <a:r>
-              <a:rPr sz="3100" b="1" u="none">
+              <a:rPr sz="2000" b="0" u="none">
                 <a:solidFill>
-                  <a:srgbClr val="0B1F3A"/>
+                  <a:srgbClr val="4A5568"/>
                 </a:solidFill>
                 <a:latin typeface="Times New Roman"/>
-                <a:ea typeface="Noto Sans CJK SC"/>
+                <a:ea typeface="Noto Serif CJK SC"/>
               </a:rPr>
-              <a:t>第4节 函数的对称性及应用</a:t>
-            </a:r>
-          </a:p>
-        </p:txBody>
-      </p:sp>
-      <p:sp>
-        <p:nvSpPr>
-          <p:cNvPr id="15" name="Rectangle 14"/>
+              <a:t>高三数学</a:t>
+            </a:r>
+          </a:p>
+        </p:txBody>
+      </p:sp>
+      <p:sp>
+        <p:nvSpPr>
+          <p:cNvPr id="16" name="Rounded Rectangle 15"/>
           <p:cNvSpPr/>
           <p:nvPr/>
         </p:nvSpPr>
         <p:spPr>
           <a:xfrm>
-            <a:off x="896112" y="3611880"/>
-            <a:ext cx="822960" cy="82296"/>
-          </a:xfrm>
-          <a:prstGeom prst="rect">
-            <a:avLst/>
-          </a:prstGeom>
-          <a:solidFill>
-            <a:srgbClr val="2F6FED"/>
-          </a:solidFill>
-          <a:ln>
-            <a:noFill/>
+            <a:off x="1725015" y="4617720"/>
+            <a:ext cx="1572768" cy="512064"/>
+          </a:xfrm>
+          <a:prstGeom prst="roundRect">
+            <a:avLst>
+              <a:gd name="adj" fmla="val 40000"/>
+            </a:avLst>
+          </a:prstGeom>
+          <a:solidFill>
+            <a:srgbClr val="FFFFFF"/>
+          </a:solidFill>
+          <a:ln w="19050">
+            <a:solidFill>
+              <a:srgbClr val="1F3864"/>
+            </a:solidFill>
           </a:ln>
           <a:effectLst/>
         </p:spPr>
@@ -3718,142 +3767,14 @@
       </p:sp>
       <p:sp>
         <p:nvSpPr>
-          <p:cNvPr id="16" name="TextBox 15"/>
-          <p:cNvSpPr txBox="1"/>
-          <p:nvPr/>
-        </p:nvSpPr>
-        <p:spPr>
-          <a:xfrm>
-            <a:off x="896112" y="3886200"/>
-            <a:ext cx="6095847" cy="731520"/>
-          </a:xfrm>
-          <a:prstGeom prst="rect">
-            <a:avLst/>
-          </a:prstGeom>
-          <a:noFill/>
-        </p:spPr>
-        <p:txBody>
-          <a:bodyPr wrap="square" anchor="t" lIns="54864" rIns="54864" tIns="0" bIns="0">
-            <a:spAutoFit/>
-          </a:bodyPr>
-          <a:lstStyle/>
-          <a:p>
-            <a:pPr algn="l">
-              <a:lnSpc>
-                <a:spcPct val="130000"/>
-              </a:lnSpc>
-              <a:defRPr sz="2000"/>
-            </a:pPr>
-            <a:r>
-              <a:rPr sz="2000" b="0" u="none">
-                <a:solidFill>
-                  <a:srgbClr val="4A5568"/>
-                </a:solidFill>
-                <a:latin typeface="Times New Roman"/>
-                <a:ea typeface="Noto Sans CJK SC"/>
-              </a:rPr>
-              <a:t>高三数学</a:t>
-            </a:r>
-          </a:p>
-        </p:txBody>
-      </p:sp>
-      <p:sp>
-        <p:nvSpPr>
           <p:cNvPr id="17" name="TextBox 16"/>
           <p:cNvSpPr txBox="1"/>
           <p:nvPr/>
         </p:nvSpPr>
         <p:spPr>
           <a:xfrm>
-            <a:off x="896112" y="4754880"/>
-            <a:ext cx="6095847" cy="457200"/>
-          </a:xfrm>
-          <a:prstGeom prst="rect">
-            <a:avLst/>
-          </a:prstGeom>
-          <a:noFill/>
-        </p:spPr>
-        <p:txBody>
-          <a:bodyPr wrap="square" anchor="t" lIns="54864" rIns="54864" tIns="0" bIns="0">
-            <a:spAutoFit/>
-          </a:bodyPr>
-          <a:lstStyle/>
-          <a:p>
-            <a:pPr algn="l">
-              <a:lnSpc>
-                <a:spcPct val="130000"/>
-              </a:lnSpc>
-              <a:defRPr sz="1300"/>
-            </a:pPr>
-            <a:r>
-              <a:rPr sz="1300" b="0" u="none">
-                <a:solidFill>
-                  <a:srgbClr val="7A8698"/>
-                </a:solidFill>
-                <a:latin typeface="Times New Roman"/>
-                <a:ea typeface="Noto Sans CJK SC"/>
-              </a:rPr>
-              <a:t>胶州四中</a:t>
-            </a:r>
-          </a:p>
-        </p:txBody>
-      </p:sp>
-      <p:sp>
-        <p:nvSpPr>
-          <p:cNvPr id="18" name="Rounded Rectangle 17"/>
-          <p:cNvSpPr/>
-          <p:nvPr/>
-        </p:nvSpPr>
-        <p:spPr>
-          <a:xfrm>
-            <a:off x="10637215" y="5760720"/>
-            <a:ext cx="822960" cy="402336"/>
-          </a:xfrm>
-          <a:prstGeom prst="roundRect">
-            <a:avLst>
-              <a:gd name="adj" fmla="val 30000"/>
-            </a:avLst>
-          </a:prstGeom>
-          <a:solidFill>
-            <a:srgbClr val="0B1F3A"/>
-          </a:solidFill>
-          <a:ln>
-            <a:noFill/>
-          </a:ln>
-          <a:effectLst/>
-        </p:spPr>
-        <p:style>
-          <a:lnRef idx="1">
-            <a:schemeClr val="accent1"/>
-          </a:lnRef>
-          <a:fillRef idx="3">
-            <a:schemeClr val="accent1"/>
-          </a:fillRef>
-          <a:effectRef idx="2">
-            <a:schemeClr val="accent1"/>
-          </a:effectRef>
-          <a:fontRef idx="minor">
-            <a:schemeClr val="lt1"/>
-          </a:fontRef>
-        </p:style>
-        <p:txBody>
-          <a:bodyPr rtlCol="0" anchor="ctr"/>
-          <a:lstStyle/>
-          <a:p>
-            <a:pPr algn="ctr"/>
-          </a:p>
-        </p:txBody>
-      </p:sp>
-      <p:sp>
-        <p:nvSpPr>
-          <p:cNvPr id="19" name="TextBox 18"/>
-          <p:cNvSpPr txBox="1"/>
-          <p:nvPr/>
-        </p:nvSpPr>
-        <p:spPr>
-          <a:xfrm>
-            <a:off x="10637215" y="5779008"/>
-            <a:ext cx="822960" cy="365760"/>
+            <a:off x="1725015" y="4645152"/>
+            <a:ext cx="1572768" cy="457200"/>
           </a:xfrm>
           <a:prstGeom prst="rect">
             <a:avLst/>
@@ -3875,12 +3796,409 @@
             <a:r>
               <a:rPr sz="1300" b="1" u="none">
                 <a:solidFill>
-                  <a:srgbClr val="FFFFFF"/>
+                  <a:srgbClr val="1F3864"/>
                 </a:solidFill>
                 <a:latin typeface="Times New Roman"/>
-                <a:ea typeface="Noto Sans CJK SC"/>
+                <a:ea typeface="Noto Serif CJK SC"/>
               </a:rPr>
-              <a:t>学案</a:t>
+              <a:t>知识梳理</a:t>
+            </a:r>
+          </a:p>
+        </p:txBody>
+      </p:sp>
+      <p:sp>
+        <p:nvSpPr>
+          <p:cNvPr id="18" name="Rounded Rectangle 17"/>
+          <p:cNvSpPr/>
+          <p:nvPr/>
+        </p:nvSpPr>
+        <p:spPr>
+          <a:xfrm>
+            <a:off x="3517239" y="4617720"/>
+            <a:ext cx="1572768" cy="512064"/>
+          </a:xfrm>
+          <a:prstGeom prst="roundRect">
+            <a:avLst>
+              <a:gd name="adj" fmla="val 40000"/>
+            </a:avLst>
+          </a:prstGeom>
+          <a:solidFill>
+            <a:srgbClr val="FFFFFF"/>
+          </a:solidFill>
+          <a:ln w="19050">
+            <a:solidFill>
+              <a:srgbClr val="2F6FED"/>
+            </a:solidFill>
+          </a:ln>
+          <a:effectLst/>
+        </p:spPr>
+        <p:style>
+          <a:lnRef idx="1">
+            <a:schemeClr val="accent1"/>
+          </a:lnRef>
+          <a:fillRef idx="3">
+            <a:schemeClr val="accent1"/>
+          </a:fillRef>
+          <a:effectRef idx="2">
+            <a:schemeClr val="accent1"/>
+          </a:effectRef>
+          <a:fontRef idx="minor">
+            <a:schemeClr val="lt1"/>
+          </a:fontRef>
+        </p:style>
+        <p:txBody>
+          <a:bodyPr rtlCol="0" anchor="ctr"/>
+          <a:lstStyle/>
+          <a:p>
+            <a:pPr algn="ctr"/>
+          </a:p>
+        </p:txBody>
+      </p:sp>
+      <p:sp>
+        <p:nvSpPr>
+          <p:cNvPr id="19" name="TextBox 18"/>
+          <p:cNvSpPr txBox="1"/>
+          <p:nvPr/>
+        </p:nvSpPr>
+        <p:spPr>
+          <a:xfrm>
+            <a:off x="3517239" y="4645152"/>
+            <a:ext cx="1572768" cy="457200"/>
+          </a:xfrm>
+          <a:prstGeom prst="rect">
+            <a:avLst/>
+          </a:prstGeom>
+          <a:noFill/>
+        </p:spPr>
+        <p:txBody>
+          <a:bodyPr wrap="square" anchor="ctr" lIns="54864" rIns="54864" tIns="0" bIns="0">
+            <a:spAutoFit/>
+          </a:bodyPr>
+          <a:lstStyle/>
+          <a:p>
+            <a:pPr algn="ctr">
+              <a:lnSpc>
+                <a:spcPct val="130000"/>
+              </a:lnSpc>
+              <a:defRPr sz="1300"/>
+            </a:pPr>
+            <a:r>
+              <a:rPr sz="1300" b="1" u="none">
+                <a:solidFill>
+                  <a:srgbClr val="2F6FED"/>
+                </a:solidFill>
+                <a:latin typeface="Times New Roman"/>
+                <a:ea typeface="Noto Serif CJK SC"/>
+              </a:rPr>
+              <a:t>典型例题</a:t>
+            </a:r>
+          </a:p>
+        </p:txBody>
+      </p:sp>
+      <p:sp>
+        <p:nvSpPr>
+          <p:cNvPr id="20" name="Rounded Rectangle 19"/>
+          <p:cNvSpPr/>
+          <p:nvPr/>
+        </p:nvSpPr>
+        <p:spPr>
+          <a:xfrm>
+            <a:off x="5309463" y="4617720"/>
+            <a:ext cx="1572768" cy="512064"/>
+          </a:xfrm>
+          <a:prstGeom prst="roundRect">
+            <a:avLst>
+              <a:gd name="adj" fmla="val 40000"/>
+            </a:avLst>
+          </a:prstGeom>
+          <a:solidFill>
+            <a:srgbClr val="FFFFFF"/>
+          </a:solidFill>
+          <a:ln w="19050">
+            <a:solidFill>
+              <a:srgbClr val="C00000"/>
+            </a:solidFill>
+          </a:ln>
+          <a:effectLst/>
+        </p:spPr>
+        <p:style>
+          <a:lnRef idx="1">
+            <a:schemeClr val="accent1"/>
+          </a:lnRef>
+          <a:fillRef idx="3">
+            <a:schemeClr val="accent1"/>
+          </a:fillRef>
+          <a:effectRef idx="2">
+            <a:schemeClr val="accent1"/>
+          </a:effectRef>
+          <a:fontRef idx="minor">
+            <a:schemeClr val="lt1"/>
+          </a:fontRef>
+        </p:style>
+        <p:txBody>
+          <a:bodyPr rtlCol="0" anchor="ctr"/>
+          <a:lstStyle/>
+          <a:p>
+            <a:pPr algn="ctr"/>
+          </a:p>
+        </p:txBody>
+      </p:sp>
+      <p:sp>
+        <p:nvSpPr>
+          <p:cNvPr id="21" name="TextBox 20"/>
+          <p:cNvSpPr txBox="1"/>
+          <p:nvPr/>
+        </p:nvSpPr>
+        <p:spPr>
+          <a:xfrm>
+            <a:off x="5309463" y="4645152"/>
+            <a:ext cx="1572768" cy="457200"/>
+          </a:xfrm>
+          <a:prstGeom prst="rect">
+            <a:avLst/>
+          </a:prstGeom>
+          <a:noFill/>
+        </p:spPr>
+        <p:txBody>
+          <a:bodyPr wrap="square" anchor="ctr" lIns="54864" rIns="54864" tIns="0" bIns="0">
+            <a:spAutoFit/>
+          </a:bodyPr>
+          <a:lstStyle/>
+          <a:p>
+            <a:pPr algn="ctr">
+              <a:lnSpc>
+                <a:spcPct val="130000"/>
+              </a:lnSpc>
+              <a:defRPr sz="1300"/>
+            </a:pPr>
+            <a:r>
+              <a:rPr sz="1300" b="1" u="none">
+                <a:solidFill>
+                  <a:srgbClr val="C00000"/>
+                </a:solidFill>
+                <a:latin typeface="Times New Roman"/>
+                <a:ea typeface="Noto Serif CJK SC"/>
+              </a:rPr>
+              <a:t>变式训练</a:t>
+            </a:r>
+          </a:p>
+        </p:txBody>
+      </p:sp>
+      <p:sp>
+        <p:nvSpPr>
+          <p:cNvPr id="22" name="Rounded Rectangle 21"/>
+          <p:cNvSpPr/>
+          <p:nvPr/>
+        </p:nvSpPr>
+        <p:spPr>
+          <a:xfrm>
+            <a:off x="7101687" y="4617720"/>
+            <a:ext cx="1572768" cy="512064"/>
+          </a:xfrm>
+          <a:prstGeom prst="roundRect">
+            <a:avLst>
+              <a:gd name="adj" fmla="val 40000"/>
+            </a:avLst>
+          </a:prstGeom>
+          <a:solidFill>
+            <a:srgbClr val="FFFFFF"/>
+          </a:solidFill>
+          <a:ln w="19050">
+            <a:solidFill>
+              <a:srgbClr val="E8B21A"/>
+            </a:solidFill>
+          </a:ln>
+          <a:effectLst/>
+        </p:spPr>
+        <p:style>
+          <a:lnRef idx="1">
+            <a:schemeClr val="accent1"/>
+          </a:lnRef>
+          <a:fillRef idx="3">
+            <a:schemeClr val="accent1"/>
+          </a:fillRef>
+          <a:effectRef idx="2">
+            <a:schemeClr val="accent1"/>
+          </a:effectRef>
+          <a:fontRef idx="minor">
+            <a:schemeClr val="lt1"/>
+          </a:fontRef>
+        </p:style>
+        <p:txBody>
+          <a:bodyPr rtlCol="0" anchor="ctr"/>
+          <a:lstStyle/>
+          <a:p>
+            <a:pPr algn="ctr"/>
+          </a:p>
+        </p:txBody>
+      </p:sp>
+      <p:sp>
+        <p:nvSpPr>
+          <p:cNvPr id="23" name="TextBox 22"/>
+          <p:cNvSpPr txBox="1"/>
+          <p:nvPr/>
+        </p:nvSpPr>
+        <p:spPr>
+          <a:xfrm>
+            <a:off x="7101687" y="4645152"/>
+            <a:ext cx="1572768" cy="457200"/>
+          </a:xfrm>
+          <a:prstGeom prst="rect">
+            <a:avLst/>
+          </a:prstGeom>
+          <a:noFill/>
+        </p:spPr>
+        <p:txBody>
+          <a:bodyPr wrap="square" anchor="ctr" lIns="54864" rIns="54864" tIns="0" bIns="0">
+            <a:spAutoFit/>
+          </a:bodyPr>
+          <a:lstStyle/>
+          <a:p>
+            <a:pPr algn="ctr">
+              <a:lnSpc>
+                <a:spcPct val="130000"/>
+              </a:lnSpc>
+              <a:defRPr sz="1300"/>
+            </a:pPr>
+            <a:r>
+              <a:rPr sz="1300" b="1" u="none">
+                <a:solidFill>
+                  <a:srgbClr val="E8B21A"/>
+                </a:solidFill>
+                <a:latin typeface="Times New Roman"/>
+                <a:ea typeface="Noto Serif CJK SC"/>
+              </a:rPr>
+              <a:t>当堂检测</a:t>
+            </a:r>
+          </a:p>
+        </p:txBody>
+      </p:sp>
+      <p:sp>
+        <p:nvSpPr>
+          <p:cNvPr id="24" name="Rounded Rectangle 23"/>
+          <p:cNvSpPr/>
+          <p:nvPr/>
+        </p:nvSpPr>
+        <p:spPr>
+          <a:xfrm>
+            <a:off x="8893911" y="4617720"/>
+            <a:ext cx="1572768" cy="512064"/>
+          </a:xfrm>
+          <a:prstGeom prst="roundRect">
+            <a:avLst>
+              <a:gd name="adj" fmla="val 40000"/>
+            </a:avLst>
+          </a:prstGeom>
+          <a:solidFill>
+            <a:srgbClr val="FFFFFF"/>
+          </a:solidFill>
+          <a:ln w="19050">
+            <a:solidFill>
+              <a:srgbClr val="2E8B57"/>
+            </a:solidFill>
+          </a:ln>
+          <a:effectLst/>
+        </p:spPr>
+        <p:style>
+          <a:lnRef idx="1">
+            <a:schemeClr val="accent1"/>
+          </a:lnRef>
+          <a:fillRef idx="3">
+            <a:schemeClr val="accent1"/>
+          </a:fillRef>
+          <a:effectRef idx="2">
+            <a:schemeClr val="accent1"/>
+          </a:effectRef>
+          <a:fontRef idx="minor">
+            <a:schemeClr val="lt1"/>
+          </a:fontRef>
+        </p:style>
+        <p:txBody>
+          <a:bodyPr rtlCol="0" anchor="ctr"/>
+          <a:lstStyle/>
+          <a:p>
+            <a:pPr algn="ctr"/>
+          </a:p>
+        </p:txBody>
+      </p:sp>
+      <p:sp>
+        <p:nvSpPr>
+          <p:cNvPr id="25" name="TextBox 24"/>
+          <p:cNvSpPr txBox="1"/>
+          <p:nvPr/>
+        </p:nvSpPr>
+        <p:spPr>
+          <a:xfrm>
+            <a:off x="8893911" y="4645152"/>
+            <a:ext cx="1572768" cy="457200"/>
+          </a:xfrm>
+          <a:prstGeom prst="rect">
+            <a:avLst/>
+          </a:prstGeom>
+          <a:noFill/>
+        </p:spPr>
+        <p:txBody>
+          <a:bodyPr wrap="square" anchor="ctr" lIns="54864" rIns="54864" tIns="0" bIns="0">
+            <a:spAutoFit/>
+          </a:bodyPr>
+          <a:lstStyle/>
+          <a:p>
+            <a:pPr algn="ctr">
+              <a:lnSpc>
+                <a:spcPct val="130000"/>
+              </a:lnSpc>
+              <a:defRPr sz="1300"/>
+            </a:pPr>
+            <a:r>
+              <a:rPr sz="1300" b="1" u="none">
+                <a:solidFill>
+                  <a:srgbClr val="2E8B57"/>
+                </a:solidFill>
+                <a:latin typeface="Times New Roman"/>
+                <a:ea typeface="Noto Serif CJK SC"/>
+              </a:rPr>
+              <a:t>课堂小结</a:t>
+            </a:r>
+          </a:p>
+        </p:txBody>
+      </p:sp>
+      <p:sp>
+        <p:nvSpPr>
+          <p:cNvPr id="26" name="TextBox 25"/>
+          <p:cNvSpPr txBox="1"/>
+          <p:nvPr/>
+        </p:nvSpPr>
+        <p:spPr>
+          <a:xfrm>
+            <a:off x="1280160" y="5577840"/>
+            <a:ext cx="9631375" cy="457200"/>
+          </a:xfrm>
+          <a:prstGeom prst="rect">
+            <a:avLst/>
+          </a:prstGeom>
+          <a:noFill/>
+        </p:spPr>
+        <p:txBody>
+          <a:bodyPr wrap="square" anchor="t" lIns="54864" rIns="54864" tIns="0" bIns="0">
+            <a:spAutoFit/>
+          </a:bodyPr>
+          <a:lstStyle/>
+          <a:p>
+            <a:pPr algn="ctr">
+              <a:lnSpc>
+                <a:spcPct val="130000"/>
+              </a:lnSpc>
+              <a:defRPr sz="1300"/>
+            </a:pPr>
+            <a:r>
+              <a:rPr sz="1300" b="0" u="none">
+                <a:solidFill>
+                  <a:srgbClr val="7A8698"/>
+                </a:solidFill>
+                <a:latin typeface="Times New Roman"/>
+                <a:ea typeface="Noto Serif CJK SC"/>
+              </a:rPr>
+              <a:t>胶州四中</a:t>
             </a:r>
           </a:p>
         </p:txBody>
@@ -3912,13 +4230,13 @@
         <p:spPr>
           <a:xfrm>
             <a:off x="0" y="0"/>
-            <a:ext cx="12191695" cy="822960"/>
-          </a:xfrm>
-          <a:prstGeom prst="rect">
-            <a:avLst/>
-          </a:prstGeom>
-          <a:solidFill>
-            <a:srgbClr val="0B1F3A"/>
+            <a:ext cx="12191695" cy="82296"/>
+          </a:xfrm>
+          <a:prstGeom prst="rect">
+            <a:avLst/>
+          </a:prstGeom>
+          <a:solidFill>
+            <a:srgbClr val="1F3864"/>
           </a:solidFill>
           <a:ln>
             <a:noFill/>
@@ -3949,58 +4267,14 @@
       </p:sp>
       <p:sp>
         <p:nvSpPr>
-          <p:cNvPr id="3" name="Rectangle 2"/>
-          <p:cNvSpPr/>
-          <p:nvPr/>
-        </p:nvSpPr>
-        <p:spPr>
-          <a:xfrm>
-            <a:off x="0" y="822960"/>
-            <a:ext cx="12191695" cy="45720"/>
-          </a:xfrm>
-          <a:prstGeom prst="rect">
-            <a:avLst/>
-          </a:prstGeom>
-          <a:solidFill>
-            <a:srgbClr val="2F6FED"/>
-          </a:solidFill>
-          <a:ln>
-            <a:noFill/>
-          </a:ln>
-          <a:effectLst/>
-        </p:spPr>
-        <p:style>
-          <a:lnRef idx="1">
-            <a:schemeClr val="accent1"/>
-          </a:lnRef>
-          <a:fillRef idx="3">
-            <a:schemeClr val="accent1"/>
-          </a:fillRef>
-          <a:effectRef idx="2">
-            <a:schemeClr val="accent1"/>
-          </a:effectRef>
-          <a:fontRef idx="minor">
-            <a:schemeClr val="lt1"/>
-          </a:fontRef>
-        </p:style>
-        <p:txBody>
-          <a:bodyPr rtlCol="0" anchor="ctr"/>
-          <a:lstStyle/>
-          <a:p>
-            <a:pPr algn="ctr"/>
-          </a:p>
-        </p:txBody>
-      </p:sp>
-      <p:sp>
-        <p:nvSpPr>
-          <p:cNvPr id="4" name="TextBox 3"/>
+          <p:cNvPr id="3" name="TextBox 2"/>
           <p:cNvSpPr txBox="1"/>
           <p:nvPr/>
         </p:nvSpPr>
         <p:spPr>
           <a:xfrm>
-            <a:off x="548640" y="137160"/>
-            <a:ext cx="8442656" cy="548640"/>
+            <a:off x="548640" y="292608"/>
+            <a:ext cx="7985455" cy="566928"/>
           </a:xfrm>
           <a:prstGeom prst="rect">
             <a:avLst/>
@@ -4022,10 +4296,10 @@
             <a:r>
               <a:rPr sz="2600" b="1" u="none">
                 <a:solidFill>
-                  <a:srgbClr val="FFFFFF"/>
+                  <a:srgbClr val="1F3864"/>
                 </a:solidFill>
                 <a:latin typeface="Times New Roman"/>
-                <a:ea typeface="Noto Sans CJK SC"/>
+                <a:ea typeface="Noto Serif CJK SC"/>
               </a:rPr>
               <a:t>考点一 函数的对称性</a:t>
             </a:r>
@@ -4034,13 +4308,13 @@
       </p:sp>
       <p:sp>
         <p:nvSpPr>
-          <p:cNvPr id="5" name="Rounded Rectangle 4"/>
+          <p:cNvPr id="4" name="Rounded Rectangle 3"/>
           <p:cNvSpPr/>
           <p:nvPr/>
         </p:nvSpPr>
         <p:spPr>
           <a:xfrm>
-            <a:off x="10966399" y="219456"/>
+            <a:off x="10966399" y="384048"/>
             <a:ext cx="676656" cy="365760"/>
           </a:xfrm>
           <a:prstGeom prst="roundRect">
@@ -4049,7 +4323,7 @@
             </a:avLst>
           </a:prstGeom>
           <a:solidFill>
-            <a:srgbClr val="2E4A78"/>
+            <a:srgbClr val="C00000"/>
           </a:solidFill>
           <a:ln>
             <a:noFill/>
@@ -4080,13 +4354,13 @@
       </p:sp>
       <p:sp>
         <p:nvSpPr>
-          <p:cNvPr id="6" name="TextBox 5"/>
+          <p:cNvPr id="5" name="TextBox 4"/>
           <p:cNvSpPr txBox="1"/>
           <p:nvPr/>
         </p:nvSpPr>
         <p:spPr>
           <a:xfrm>
-            <a:off x="10966399" y="237744"/>
+            <a:off x="10966399" y="402336"/>
             <a:ext cx="676656" cy="329184"/>
           </a:xfrm>
           <a:prstGeom prst="rect">
@@ -4112,10 +4386,54 @@
                   <a:srgbClr val="FFFFFF"/>
                 </a:solidFill>
                 <a:latin typeface="Times New Roman"/>
-                <a:ea typeface="Noto Sans CJK SC"/>
+                <a:ea typeface="Noto Serif CJK SC"/>
               </a:rPr>
               <a:t>例题</a:t>
             </a:r>
+          </a:p>
+        </p:txBody>
+      </p:sp>
+      <p:sp>
+        <p:nvSpPr>
+          <p:cNvPr id="6" name="Rectangle 5"/>
+          <p:cNvSpPr/>
+          <p:nvPr/>
+        </p:nvSpPr>
+        <p:spPr>
+          <a:xfrm>
+            <a:off x="548640" y="950976"/>
+            <a:ext cx="11094415" cy="9525"/>
+          </a:xfrm>
+          <a:prstGeom prst="rect">
+            <a:avLst/>
+          </a:prstGeom>
+          <a:solidFill>
+            <a:srgbClr val="D8DEE8"/>
+          </a:solidFill>
+          <a:ln>
+            <a:noFill/>
+          </a:ln>
+          <a:effectLst/>
+        </p:spPr>
+        <p:style>
+          <a:lnRef idx="1">
+            <a:schemeClr val="accent1"/>
+          </a:lnRef>
+          <a:fillRef idx="3">
+            <a:schemeClr val="accent1"/>
+          </a:fillRef>
+          <a:effectRef idx="2">
+            <a:schemeClr val="accent1"/>
+          </a:effectRef>
+          <a:fontRef idx="minor">
+            <a:schemeClr val="lt1"/>
+          </a:fontRef>
+        </p:style>
+        <p:txBody>
+          <a:bodyPr rtlCol="0" anchor="ctr"/>
+          <a:lstStyle/>
+          <a:p>
+            <a:pPr algn="ctr"/>
           </a:p>
         </p:txBody>
       </p:sp>
@@ -4136,7 +4454,7 @@
             </a:avLst>
           </a:prstGeom>
           <a:solidFill>
-            <a:srgbClr val="15803D"/>
+            <a:srgbClr val="2F6FED"/>
           </a:solidFill>
           <a:ln>
             <a:noFill/>
@@ -4199,7 +4517,7 @@
                   <a:srgbClr val="FFFFFF"/>
                 </a:solidFill>
                 <a:latin typeface="Times New Roman"/>
-                <a:ea typeface="Noto Sans CJK SC"/>
+                <a:ea typeface="Noto Serif CJK SC"/>
               </a:rPr>
               <a:t>例1</a:t>
             </a:r>
@@ -4240,17 +4558,17 @@
                   <a:srgbClr val="2F6FED"/>
                 </a:solidFill>
                 <a:latin typeface="Times New Roman"/>
-                <a:ea typeface="Noto Sans CJK SC"/>
+                <a:ea typeface="Noto Serif CJK SC"/>
               </a:rPr>
               <a:t>解析　</a:t>
             </a:r>
             <a:r>
               <a:rPr sz="2000" b="0" u="none">
                 <a:solidFill>
-                  <a:srgbClr val="16202E"/>
+                  <a:srgbClr val="1A2233"/>
                 </a:solidFill>
                 <a:latin typeface="Times New Roman"/>
-                <a:ea typeface="Noto Sans CJK SC"/>
+                <a:ea typeface="Noto Serif CJK SC"/>
               </a:rPr>
               <a:t>由 f(x+1) 为奇函数得 f(1+x)=-f(1-x)，即关于点 (1,0) 对称；又关于 x=-1 对称，两条对称轴（中心）间距为 2，故周期 T=4×2÷2=4。</a:t>
             </a:r>
@@ -4310,7 +4628,7 @@
         <p:spPr>
           <a:xfrm>
             <a:off x="548640" y="6345936"/>
-            <a:ext cx="8595360" cy="274320"/>
+            <a:ext cx="7498079" cy="274320"/>
           </a:xfrm>
           <a:prstGeom prst="rect">
             <a:avLst/>
@@ -4335,7 +4653,7 @@
                   <a:srgbClr val="8A94A6"/>
                 </a:solidFill>
                 <a:latin typeface="Times New Roman"/>
-                <a:ea typeface="Noto Sans CJK SC"/>
+                <a:ea typeface="Noto Serif CJK SC"/>
               </a:rPr>
               <a:t>胶州四中 · 第4节 函数的对称性及应用</a:t>
             </a:r>
@@ -4376,7 +4694,7 @@
                   <a:srgbClr val="8A94A6"/>
                 </a:solidFill>
                 <a:latin typeface="Times New Roman"/>
-                <a:ea typeface="Noto Sans CJK SC"/>
+                <a:ea typeface="Noto Serif CJK SC"/>
               </a:rPr>
               <a:t>10</a:t>
             </a:r>
@@ -4410,13 +4728,13 @@
         <p:spPr>
           <a:xfrm>
             <a:off x="0" y="0"/>
-            <a:ext cx="12191695" cy="822960"/>
-          </a:xfrm>
-          <a:prstGeom prst="rect">
-            <a:avLst/>
-          </a:prstGeom>
-          <a:solidFill>
-            <a:srgbClr val="0B1F3A"/>
+            <a:ext cx="12191695" cy="82296"/>
+          </a:xfrm>
+          <a:prstGeom prst="rect">
+            <a:avLst/>
+          </a:prstGeom>
+          <a:solidFill>
+            <a:srgbClr val="1F3864"/>
           </a:solidFill>
           <a:ln>
             <a:noFill/>
@@ -4447,58 +4765,14 @@
       </p:sp>
       <p:sp>
         <p:nvSpPr>
-          <p:cNvPr id="3" name="Rectangle 2"/>
-          <p:cNvSpPr/>
-          <p:nvPr/>
-        </p:nvSpPr>
-        <p:spPr>
-          <a:xfrm>
-            <a:off x="0" y="822960"/>
-            <a:ext cx="12191695" cy="45720"/>
-          </a:xfrm>
-          <a:prstGeom prst="rect">
-            <a:avLst/>
-          </a:prstGeom>
-          <a:solidFill>
-            <a:srgbClr val="2F6FED"/>
-          </a:solidFill>
-          <a:ln>
-            <a:noFill/>
-          </a:ln>
-          <a:effectLst/>
-        </p:spPr>
-        <p:style>
-          <a:lnRef idx="1">
-            <a:schemeClr val="accent1"/>
-          </a:lnRef>
-          <a:fillRef idx="3">
-            <a:schemeClr val="accent1"/>
-          </a:fillRef>
-          <a:effectRef idx="2">
-            <a:schemeClr val="accent1"/>
-          </a:effectRef>
-          <a:fontRef idx="minor">
-            <a:schemeClr val="lt1"/>
-          </a:fontRef>
-        </p:style>
-        <p:txBody>
-          <a:bodyPr rtlCol="0" anchor="ctr"/>
-          <a:lstStyle/>
-          <a:p>
-            <a:pPr algn="ctr"/>
-          </a:p>
-        </p:txBody>
-      </p:sp>
-      <p:sp>
-        <p:nvSpPr>
-          <p:cNvPr id="4" name="TextBox 3"/>
+          <p:cNvPr id="3" name="TextBox 2"/>
           <p:cNvSpPr txBox="1"/>
           <p:nvPr/>
         </p:nvSpPr>
         <p:spPr>
           <a:xfrm>
-            <a:off x="548640" y="137160"/>
-            <a:ext cx="8442656" cy="548640"/>
+            <a:off x="548640" y="292608"/>
+            <a:ext cx="7985455" cy="566928"/>
           </a:xfrm>
           <a:prstGeom prst="rect">
             <a:avLst/>
@@ -4520,10 +4794,10 @@
             <a:r>
               <a:rPr sz="2600" b="1" u="none">
                 <a:solidFill>
-                  <a:srgbClr val="FFFFFF"/>
+                  <a:srgbClr val="1F3864"/>
                 </a:solidFill>
                 <a:latin typeface="Times New Roman"/>
-                <a:ea typeface="Noto Sans CJK SC"/>
+                <a:ea typeface="Noto Serif CJK SC"/>
               </a:rPr>
               <a:t>考点二 对称性与周期性</a:t>
             </a:r>
@@ -4532,13 +4806,13 @@
       </p:sp>
       <p:sp>
         <p:nvSpPr>
-          <p:cNvPr id="5" name="Rounded Rectangle 4"/>
+          <p:cNvPr id="4" name="Rounded Rectangle 3"/>
           <p:cNvSpPr/>
           <p:nvPr/>
         </p:nvSpPr>
         <p:spPr>
           <a:xfrm>
-            <a:off x="10966399" y="219456"/>
+            <a:off x="10966399" y="384048"/>
             <a:ext cx="676656" cy="365760"/>
           </a:xfrm>
           <a:prstGeom prst="roundRect">
@@ -4547,7 +4821,7 @@
             </a:avLst>
           </a:prstGeom>
           <a:solidFill>
-            <a:srgbClr val="2E4A78"/>
+            <a:srgbClr val="C00000"/>
           </a:solidFill>
           <a:ln>
             <a:noFill/>
@@ -4578,13 +4852,13 @@
       </p:sp>
       <p:sp>
         <p:nvSpPr>
-          <p:cNvPr id="6" name="TextBox 5"/>
+          <p:cNvPr id="5" name="TextBox 4"/>
           <p:cNvSpPr txBox="1"/>
           <p:nvPr/>
         </p:nvSpPr>
         <p:spPr>
           <a:xfrm>
-            <a:off x="10966399" y="237744"/>
+            <a:off x="10966399" y="402336"/>
             <a:ext cx="676656" cy="329184"/>
           </a:xfrm>
           <a:prstGeom prst="rect">
@@ -4610,10 +4884,54 @@
                   <a:srgbClr val="FFFFFF"/>
                 </a:solidFill>
                 <a:latin typeface="Times New Roman"/>
-                <a:ea typeface="Noto Sans CJK SC"/>
+                <a:ea typeface="Noto Serif CJK SC"/>
               </a:rPr>
               <a:t>例题</a:t>
             </a:r>
+          </a:p>
+        </p:txBody>
+      </p:sp>
+      <p:sp>
+        <p:nvSpPr>
+          <p:cNvPr id="6" name="Rectangle 5"/>
+          <p:cNvSpPr/>
+          <p:nvPr/>
+        </p:nvSpPr>
+        <p:spPr>
+          <a:xfrm>
+            <a:off x="548640" y="950976"/>
+            <a:ext cx="11094415" cy="9525"/>
+          </a:xfrm>
+          <a:prstGeom prst="rect">
+            <a:avLst/>
+          </a:prstGeom>
+          <a:solidFill>
+            <a:srgbClr val="D8DEE8"/>
+          </a:solidFill>
+          <a:ln>
+            <a:noFill/>
+          </a:ln>
+          <a:effectLst/>
+        </p:spPr>
+        <p:style>
+          <a:lnRef idx="1">
+            <a:schemeClr val="accent1"/>
+          </a:lnRef>
+          <a:fillRef idx="3">
+            <a:schemeClr val="accent1"/>
+          </a:fillRef>
+          <a:effectRef idx="2">
+            <a:schemeClr val="accent1"/>
+          </a:effectRef>
+          <a:fontRef idx="minor">
+            <a:schemeClr val="lt1"/>
+          </a:fontRef>
+        </p:style>
+        <p:txBody>
+          <a:bodyPr rtlCol="0" anchor="ctr"/>
+          <a:lstStyle/>
+          <a:p>
+            <a:pPr algn="ctr"/>
           </a:p>
         </p:txBody>
       </p:sp>
@@ -4634,7 +4952,7 @@
             </a:avLst>
           </a:prstGeom>
           <a:solidFill>
-            <a:srgbClr val="2F6FED"/>
+            <a:srgbClr val="C00000"/>
           </a:solidFill>
           <a:ln>
             <a:noFill/>
@@ -4697,7 +5015,7 @@
                   <a:srgbClr val="FFFFFF"/>
                 </a:solidFill>
                 <a:latin typeface="Times New Roman"/>
-                <a:ea typeface="Noto Sans CJK SC"/>
+                <a:ea typeface="Noto Serif CJK SC"/>
               </a:rPr>
               <a:t>例2</a:t>
             </a:r>
@@ -4735,10 +5053,10 @@
             <a:r>
               <a:rPr sz="2200" b="0" u="none">
                 <a:solidFill>
-                  <a:srgbClr val="16202E"/>
+                  <a:srgbClr val="1A2233"/>
                 </a:solidFill>
                 <a:latin typeface="Times New Roman"/>
-                <a:ea typeface="Noto Sans CJK SC"/>
+                <a:ea typeface="Noto Serif CJK SC"/>
               </a:rPr>
               <a:t>已知 f(x) 定义在 R 上，f(x+2)=-f(x)，且当 x∈[0,2] 时 f(x)=x²-2x，求 f(2025)。</a:t>
             </a:r>
@@ -4798,7 +5116,7 @@
         <p:spPr>
           <a:xfrm>
             <a:off x="548640" y="6345936"/>
-            <a:ext cx="8595360" cy="274320"/>
+            <a:ext cx="7498079" cy="274320"/>
           </a:xfrm>
           <a:prstGeom prst="rect">
             <a:avLst/>
@@ -4823,7 +5141,7 @@
                   <a:srgbClr val="8A94A6"/>
                 </a:solidFill>
                 <a:latin typeface="Times New Roman"/>
-                <a:ea typeface="Noto Sans CJK SC"/>
+                <a:ea typeface="Noto Serif CJK SC"/>
               </a:rPr>
               <a:t>胶州四中 · 第4节 函数的对称性及应用</a:t>
             </a:r>
@@ -4864,7 +5182,7 @@
                   <a:srgbClr val="8A94A6"/>
                 </a:solidFill>
                 <a:latin typeface="Times New Roman"/>
-                <a:ea typeface="Noto Sans CJK SC"/>
+                <a:ea typeface="Noto Serif CJK SC"/>
               </a:rPr>
               <a:t>11</a:t>
             </a:r>
@@ -4898,13 +5216,13 @@
         <p:spPr>
           <a:xfrm>
             <a:off x="0" y="0"/>
-            <a:ext cx="12191695" cy="822960"/>
-          </a:xfrm>
-          <a:prstGeom prst="rect">
-            <a:avLst/>
-          </a:prstGeom>
-          <a:solidFill>
-            <a:srgbClr val="0B1F3A"/>
+            <a:ext cx="12191695" cy="82296"/>
+          </a:xfrm>
+          <a:prstGeom prst="rect">
+            <a:avLst/>
+          </a:prstGeom>
+          <a:solidFill>
+            <a:srgbClr val="1F3864"/>
           </a:solidFill>
           <a:ln>
             <a:noFill/>
@@ -4935,58 +5253,14 @@
       </p:sp>
       <p:sp>
         <p:nvSpPr>
-          <p:cNvPr id="3" name="Rectangle 2"/>
-          <p:cNvSpPr/>
-          <p:nvPr/>
-        </p:nvSpPr>
-        <p:spPr>
-          <a:xfrm>
-            <a:off x="0" y="822960"/>
-            <a:ext cx="12191695" cy="45720"/>
-          </a:xfrm>
-          <a:prstGeom prst="rect">
-            <a:avLst/>
-          </a:prstGeom>
-          <a:solidFill>
-            <a:srgbClr val="2F6FED"/>
-          </a:solidFill>
-          <a:ln>
-            <a:noFill/>
-          </a:ln>
-          <a:effectLst/>
-        </p:spPr>
-        <p:style>
-          <a:lnRef idx="1">
-            <a:schemeClr val="accent1"/>
-          </a:lnRef>
-          <a:fillRef idx="3">
-            <a:schemeClr val="accent1"/>
-          </a:fillRef>
-          <a:effectRef idx="2">
-            <a:schemeClr val="accent1"/>
-          </a:effectRef>
-          <a:fontRef idx="minor">
-            <a:schemeClr val="lt1"/>
-          </a:fontRef>
-        </p:style>
-        <p:txBody>
-          <a:bodyPr rtlCol="0" anchor="ctr"/>
-          <a:lstStyle/>
-          <a:p>
-            <a:pPr algn="ctr"/>
-          </a:p>
-        </p:txBody>
-      </p:sp>
-      <p:sp>
-        <p:nvSpPr>
-          <p:cNvPr id="4" name="TextBox 3"/>
+          <p:cNvPr id="3" name="TextBox 2"/>
           <p:cNvSpPr txBox="1"/>
           <p:nvPr/>
         </p:nvSpPr>
         <p:spPr>
           <a:xfrm>
-            <a:off x="548640" y="137160"/>
-            <a:ext cx="8442656" cy="548640"/>
+            <a:off x="548640" y="292608"/>
+            <a:ext cx="7985455" cy="566928"/>
           </a:xfrm>
           <a:prstGeom prst="rect">
             <a:avLst/>
@@ -5008,10 +5282,10 @@
             <a:r>
               <a:rPr sz="2600" b="1" u="none">
                 <a:solidFill>
-                  <a:srgbClr val="FFFFFF"/>
+                  <a:srgbClr val="1F3864"/>
                 </a:solidFill>
                 <a:latin typeface="Times New Roman"/>
-                <a:ea typeface="Noto Sans CJK SC"/>
+                <a:ea typeface="Noto Serif CJK SC"/>
               </a:rPr>
               <a:t>考点二 对称性与周期性</a:t>
             </a:r>
@@ -5020,13 +5294,13 @@
       </p:sp>
       <p:sp>
         <p:nvSpPr>
-          <p:cNvPr id="5" name="Rounded Rectangle 4"/>
+          <p:cNvPr id="4" name="Rounded Rectangle 3"/>
           <p:cNvSpPr/>
           <p:nvPr/>
         </p:nvSpPr>
         <p:spPr>
           <a:xfrm>
-            <a:off x="10966399" y="219456"/>
+            <a:off x="10966399" y="384048"/>
             <a:ext cx="676656" cy="365760"/>
           </a:xfrm>
           <a:prstGeom prst="roundRect">
@@ -5035,7 +5309,7 @@
             </a:avLst>
           </a:prstGeom>
           <a:solidFill>
-            <a:srgbClr val="2E4A78"/>
+            <a:srgbClr val="C00000"/>
           </a:solidFill>
           <a:ln>
             <a:noFill/>
@@ -5066,13 +5340,13 @@
       </p:sp>
       <p:sp>
         <p:nvSpPr>
-          <p:cNvPr id="6" name="TextBox 5"/>
+          <p:cNvPr id="5" name="TextBox 4"/>
           <p:cNvSpPr txBox="1"/>
           <p:nvPr/>
         </p:nvSpPr>
         <p:spPr>
           <a:xfrm>
-            <a:off x="10966399" y="237744"/>
+            <a:off x="10966399" y="402336"/>
             <a:ext cx="676656" cy="329184"/>
           </a:xfrm>
           <a:prstGeom prst="rect">
@@ -5098,10 +5372,54 @@
                   <a:srgbClr val="FFFFFF"/>
                 </a:solidFill>
                 <a:latin typeface="Times New Roman"/>
-                <a:ea typeface="Noto Sans CJK SC"/>
+                <a:ea typeface="Noto Serif CJK SC"/>
               </a:rPr>
               <a:t>例题</a:t>
             </a:r>
+          </a:p>
+        </p:txBody>
+      </p:sp>
+      <p:sp>
+        <p:nvSpPr>
+          <p:cNvPr id="6" name="Rectangle 5"/>
+          <p:cNvSpPr/>
+          <p:nvPr/>
+        </p:nvSpPr>
+        <p:spPr>
+          <a:xfrm>
+            <a:off x="548640" y="950976"/>
+            <a:ext cx="11094415" cy="9525"/>
+          </a:xfrm>
+          <a:prstGeom prst="rect">
+            <a:avLst/>
+          </a:prstGeom>
+          <a:solidFill>
+            <a:srgbClr val="D8DEE8"/>
+          </a:solidFill>
+          <a:ln>
+            <a:noFill/>
+          </a:ln>
+          <a:effectLst/>
+        </p:spPr>
+        <p:style>
+          <a:lnRef idx="1">
+            <a:schemeClr val="accent1"/>
+          </a:lnRef>
+          <a:fillRef idx="3">
+            <a:schemeClr val="accent1"/>
+          </a:fillRef>
+          <a:effectRef idx="2">
+            <a:schemeClr val="accent1"/>
+          </a:effectRef>
+          <a:fontRef idx="minor">
+            <a:schemeClr val="lt1"/>
+          </a:fontRef>
+        </p:style>
+        <p:txBody>
+          <a:bodyPr rtlCol="0" anchor="ctr"/>
+          <a:lstStyle/>
+          <a:p>
+            <a:pPr algn="ctr"/>
           </a:p>
         </p:txBody>
       </p:sp>
@@ -5122,7 +5440,7 @@
             </a:avLst>
           </a:prstGeom>
           <a:solidFill>
-            <a:srgbClr val="15803D"/>
+            <a:srgbClr val="2F6FED"/>
           </a:solidFill>
           <a:ln>
             <a:noFill/>
@@ -5185,7 +5503,7 @@
                   <a:srgbClr val="FFFFFF"/>
                 </a:solidFill>
                 <a:latin typeface="Times New Roman"/>
-                <a:ea typeface="Noto Sans CJK SC"/>
+                <a:ea typeface="Noto Serif CJK SC"/>
               </a:rPr>
               <a:t>例2</a:t>
             </a:r>
@@ -5226,17 +5544,17 @@
                   <a:srgbClr val="2F6FED"/>
                 </a:solidFill>
                 <a:latin typeface="Times New Roman"/>
-                <a:ea typeface="Noto Sans CJK SC"/>
+                <a:ea typeface="Noto Serif CJK SC"/>
               </a:rPr>
               <a:t>解析　</a:t>
             </a:r>
             <a:r>
               <a:rPr sz="2000" b="0" u="none">
                 <a:solidFill>
-                  <a:srgbClr val="16202E"/>
+                  <a:srgbClr val="1A2233"/>
                 </a:solidFill>
                 <a:latin typeface="Times New Roman"/>
-                <a:ea typeface="Noto Sans CJK SC"/>
+                <a:ea typeface="Noto Serif CJK SC"/>
               </a:rPr>
               <a:t>由 f(x+2)=-f(x) 得 T=4；f(2025)=f(1)=-1。</a:t>
             </a:r>
@@ -5296,7 +5614,7 @@
         <p:spPr>
           <a:xfrm>
             <a:off x="548640" y="6345936"/>
-            <a:ext cx="8595360" cy="274320"/>
+            <a:ext cx="7498079" cy="274320"/>
           </a:xfrm>
           <a:prstGeom prst="rect">
             <a:avLst/>
@@ -5321,7 +5639,7 @@
                   <a:srgbClr val="8A94A6"/>
                 </a:solidFill>
                 <a:latin typeface="Times New Roman"/>
-                <a:ea typeface="Noto Sans CJK SC"/>
+                <a:ea typeface="Noto Serif CJK SC"/>
               </a:rPr>
               <a:t>胶州四中 · 第4节 函数的对称性及应用</a:t>
             </a:r>
@@ -5362,7 +5680,7 @@
                   <a:srgbClr val="8A94A6"/>
                 </a:solidFill>
                 <a:latin typeface="Times New Roman"/>
-                <a:ea typeface="Noto Sans CJK SC"/>
+                <a:ea typeface="Noto Serif CJK SC"/>
               </a:rPr>
               <a:t>12</a:t>
             </a:r>
@@ -5402,7 +5720,7 @@
             <a:avLst/>
           </a:prstGeom>
           <a:solidFill>
-            <a:srgbClr val="E4EBF7"/>
+            <a:srgbClr val="EAF0FA"/>
           </a:solidFill>
           <a:ln>
             <a:noFill/>
@@ -5446,7 +5764,7 @@
             <a:avLst/>
           </a:prstGeom>
           <a:solidFill>
-            <a:srgbClr val="E4EBF7"/>
+            <a:srgbClr val="EAF0FA"/>
           </a:solidFill>
           <a:ln>
             <a:noFill/>
@@ -5490,7 +5808,7 @@
             <a:avLst/>
           </a:prstGeom>
           <a:solidFill>
-            <a:srgbClr val="E4EBF7"/>
+            <a:srgbClr val="EAF0FA"/>
           </a:solidFill>
           <a:ln>
             <a:noFill/>
@@ -5534,7 +5852,7 @@
             <a:avLst/>
           </a:prstGeom>
           <a:solidFill>
-            <a:srgbClr val="E4EBF7"/>
+            <a:srgbClr val="EAF0FA"/>
           </a:solidFill>
           <a:ln>
             <a:noFill/>
@@ -5578,7 +5896,7 @@
             <a:avLst/>
           </a:prstGeom>
           <a:solidFill>
-            <a:srgbClr val="E4EBF7"/>
+            <a:srgbClr val="EAF0FA"/>
           </a:solidFill>
           <a:ln>
             <a:noFill/>
@@ -5622,7 +5940,7 @@
             <a:avLst/>
           </a:prstGeom>
           <a:solidFill>
-            <a:srgbClr val="E4EBF7"/>
+            <a:srgbClr val="EAF0FA"/>
           </a:solidFill>
           <a:ln>
             <a:noFill/>
@@ -5666,7 +5984,7 @@
             <a:avLst/>
           </a:prstGeom>
           <a:solidFill>
-            <a:srgbClr val="E4EBF7"/>
+            <a:srgbClr val="EAF0FA"/>
           </a:solidFill>
           <a:ln>
             <a:noFill/>
@@ -5710,7 +6028,7 @@
             <a:avLst/>
           </a:prstGeom>
           <a:solidFill>
-            <a:srgbClr val="E4EBF7"/>
+            <a:srgbClr val="EAF0FA"/>
           </a:solidFill>
           <a:ln>
             <a:noFill/>
@@ -5754,7 +6072,7 @@
             <a:avLst/>
           </a:prstGeom>
           <a:solidFill>
-            <a:srgbClr val="E4EBF7"/>
+            <a:srgbClr val="EAF0FA"/>
           </a:solidFill>
           <a:ln>
             <a:noFill/>
@@ -5785,23 +6103,27 @@
       </p:sp>
       <p:sp>
         <p:nvSpPr>
-          <p:cNvPr id="11" name="Rectangle 10"/>
+          <p:cNvPr id="11" name="Rounded Rectangle 10"/>
           <p:cNvSpPr/>
           <p:nvPr/>
         </p:nvSpPr>
         <p:spPr>
           <a:xfrm>
-            <a:off x="0" y="0"/>
-            <a:ext cx="12191695" cy="82296"/>
-          </a:xfrm>
-          <a:prstGeom prst="rect">
-            <a:avLst/>
-          </a:prstGeom>
-          <a:solidFill>
-            <a:srgbClr val="0B1F3A"/>
-          </a:solidFill>
-          <a:ln>
-            <a:noFill/>
+            <a:off x="502920" y="384048"/>
+            <a:ext cx="11185855" cy="749808"/>
+          </a:xfrm>
+          <a:prstGeom prst="roundRect">
+            <a:avLst>
+              <a:gd name="adj" fmla="val 16000"/>
+            </a:avLst>
+          </a:prstGeom>
+          <a:solidFill>
+            <a:srgbClr val="FFFFFF"/>
+          </a:solidFill>
+          <a:ln w="15875">
+            <a:solidFill>
+              <a:srgbClr val="2F6FED"/>
+            </a:solidFill>
           </a:ln>
           <a:effectLst/>
         </p:spPr>
@@ -5829,102 +6151,14 @@
       </p:sp>
       <p:sp>
         <p:nvSpPr>
-          <p:cNvPr id="12" name="Rectangle 11"/>
-          <p:cNvSpPr/>
-          <p:nvPr/>
-        </p:nvSpPr>
-        <p:spPr>
-          <a:xfrm>
-            <a:off x="548640" y="457200"/>
-            <a:ext cx="128016" cy="128016"/>
-          </a:xfrm>
-          <a:prstGeom prst="rect">
-            <a:avLst/>
-          </a:prstGeom>
-          <a:solidFill>
-            <a:srgbClr val="2F6FED"/>
-          </a:solidFill>
-          <a:ln>
-            <a:noFill/>
-          </a:ln>
-          <a:effectLst/>
-        </p:spPr>
-        <p:style>
-          <a:lnRef idx="1">
-            <a:schemeClr val="accent1"/>
-          </a:lnRef>
-          <a:fillRef idx="3">
-            <a:schemeClr val="accent1"/>
-          </a:fillRef>
-          <a:effectRef idx="2">
-            <a:schemeClr val="accent1"/>
-          </a:effectRef>
-          <a:fontRef idx="minor">
-            <a:schemeClr val="lt1"/>
-          </a:fontRef>
-        </p:style>
-        <p:txBody>
-          <a:bodyPr rtlCol="0" anchor="ctr"/>
-          <a:lstStyle/>
-          <a:p>
-            <a:pPr algn="ctr"/>
-          </a:p>
-        </p:txBody>
-      </p:sp>
-      <p:sp>
-        <p:nvSpPr>
-          <p:cNvPr id="13" name="Rectangle 12"/>
-          <p:cNvSpPr/>
-          <p:nvPr/>
-        </p:nvSpPr>
-        <p:spPr>
-          <a:xfrm>
-            <a:off x="548640" y="658368"/>
-            <a:ext cx="128016" cy="128016"/>
-          </a:xfrm>
-          <a:prstGeom prst="rect">
-            <a:avLst/>
-          </a:prstGeom>
-          <a:solidFill>
-            <a:srgbClr val="2F6FED"/>
-          </a:solidFill>
-          <a:ln>
-            <a:noFill/>
-          </a:ln>
-          <a:effectLst/>
-        </p:spPr>
-        <p:style>
-          <a:lnRef idx="1">
-            <a:schemeClr val="accent1"/>
-          </a:lnRef>
-          <a:fillRef idx="3">
-            <a:schemeClr val="accent1"/>
-          </a:fillRef>
-          <a:effectRef idx="2">
-            <a:schemeClr val="accent1"/>
-          </a:effectRef>
-          <a:fontRef idx="minor">
-            <a:schemeClr val="lt1"/>
-          </a:fontRef>
-        </p:style>
-        <p:txBody>
-          <a:bodyPr rtlCol="0" anchor="ctr"/>
-          <a:lstStyle/>
-          <a:p>
-            <a:pPr algn="ctr"/>
-          </a:p>
-        </p:txBody>
-      </p:sp>
-      <p:sp>
-        <p:nvSpPr>
-          <p:cNvPr id="14" name="TextBox 13"/>
+          <p:cNvPr id="12" name="TextBox 11"/>
           <p:cNvSpPr txBox="1"/>
           <p:nvPr/>
         </p:nvSpPr>
         <p:spPr>
           <a:xfrm>
-            <a:off x="841248" y="402336"/>
-            <a:ext cx="9448495" cy="621792"/>
+            <a:off x="868680" y="457200"/>
+            <a:ext cx="8351215" cy="603504"/>
           </a:xfrm>
           <a:prstGeom prst="rect">
             <a:avLst/>
@@ -5946,10 +6180,10 @@
             <a:r>
               <a:rPr sz="2800" b="1" u="none">
                 <a:solidFill>
-                  <a:srgbClr val="0B1F3A"/>
+                  <a:srgbClr val="1F3864"/>
                 </a:solidFill>
                 <a:latin typeface="Times New Roman"/>
-                <a:ea typeface="Noto Sans CJK SC"/>
+                <a:ea typeface="Noto Serif CJK SC"/>
               </a:rPr>
               <a:t>课时对点精练</a:t>
             </a:r>
@@ -5958,7 +6192,7 @@
       </p:sp>
       <p:sp>
         <p:nvSpPr>
-          <p:cNvPr id="15" name="Rounded Rectangle 14"/>
+          <p:cNvPr id="13" name="Rounded Rectangle 12"/>
           <p:cNvSpPr/>
           <p:nvPr/>
         </p:nvSpPr>
@@ -5973,7 +6207,7 @@
             </a:avLst>
           </a:prstGeom>
           <a:solidFill>
-            <a:srgbClr val="0B1F3A"/>
+            <a:srgbClr val="1F3864"/>
           </a:solidFill>
           <a:ln>
             <a:noFill/>
@@ -6004,7 +6238,7 @@
       </p:sp>
       <p:sp>
         <p:nvSpPr>
-          <p:cNvPr id="16" name="TextBox 15"/>
+          <p:cNvPr id="14" name="TextBox 13"/>
           <p:cNvSpPr txBox="1"/>
           <p:nvPr/>
         </p:nvSpPr>
@@ -6036,7 +6270,7 @@
                   <a:srgbClr val="FFFFFF"/>
                 </a:solidFill>
                 <a:latin typeface="Times New Roman"/>
-                <a:ea typeface="Noto Sans CJK SC"/>
+                <a:ea typeface="Noto Serif CJK SC"/>
               </a:rPr>
               <a:t>知识梳理</a:t>
             </a:r>
@@ -6045,7 +6279,7 @@
       </p:sp>
       <p:sp>
         <p:nvSpPr>
-          <p:cNvPr id="17" name="TextBox 16"/>
+          <p:cNvPr id="15" name="TextBox 14"/>
           <p:cNvSpPr txBox="1"/>
           <p:nvPr/>
         </p:nvSpPr>
@@ -6074,10 +6308,10 @@
             <a:r>
               <a:rPr sz="2600" b="0" u="none">
                 <a:solidFill>
-                  <a:srgbClr val="16202E"/>
+                  <a:srgbClr val="1A2233"/>
                 </a:solidFill>
                 <a:latin typeface="Times New Roman"/>
-                <a:ea typeface="Noto Sans CJK SC"/>
+                <a:ea typeface="Noto Serif CJK SC"/>
               </a:rPr>
               <a:t>1. 若 f(x) 的图象关于直线 x=2 对称，且 f(3)=5，则 f(1)=____。</a:t>
             </a:r>
@@ -6094,10 +6328,10 @@
             <a:r>
               <a:rPr sz="2600" b="0" u="none">
                 <a:solidFill>
-                  <a:srgbClr val="16202E"/>
+                  <a:srgbClr val="1A2233"/>
                 </a:solidFill>
                 <a:latin typeface="Times New Roman"/>
-                <a:ea typeface="Noto Sans CJK SC"/>
+                <a:ea typeface="Noto Serif CJK SC"/>
               </a:rPr>
               <a:t>2. 已知 f(x) 满足 f(x)+f(2-x)=0，则 f(x) 关于 ____ 对称。</a:t>
             </a:r>
@@ -6106,7 +6340,7 @@
       </p:sp>
       <p:sp>
         <p:nvSpPr>
-          <p:cNvPr id="18" name="Rectangle 17"/>
+          <p:cNvPr id="16" name="Rectangle 15"/>
           <p:cNvSpPr/>
           <p:nvPr/>
         </p:nvSpPr>
@@ -6150,14 +6384,14 @@
       </p:sp>
       <p:sp>
         <p:nvSpPr>
-          <p:cNvPr id="19" name="TextBox 18"/>
+          <p:cNvPr id="17" name="TextBox 16"/>
           <p:cNvSpPr txBox="1"/>
           <p:nvPr/>
         </p:nvSpPr>
         <p:spPr>
           <a:xfrm>
             <a:off x="548640" y="6345936"/>
-            <a:ext cx="8595360" cy="274320"/>
+            <a:ext cx="7498079" cy="274320"/>
           </a:xfrm>
           <a:prstGeom prst="rect">
             <a:avLst/>
@@ -6182,7 +6416,7 @@
                   <a:srgbClr val="8A94A6"/>
                 </a:solidFill>
                 <a:latin typeface="Times New Roman"/>
-                <a:ea typeface="Noto Sans CJK SC"/>
+                <a:ea typeface="Noto Serif CJK SC"/>
               </a:rPr>
               <a:t>胶州四中 · 第4节 函数的对称性及应用</a:t>
             </a:r>
@@ -6191,7 +6425,7 @@
       </p:sp>
       <p:sp>
         <p:nvSpPr>
-          <p:cNvPr id="20" name="TextBox 19"/>
+          <p:cNvPr id="18" name="TextBox 17"/>
           <p:cNvSpPr txBox="1"/>
           <p:nvPr/>
         </p:nvSpPr>
@@ -6223,7 +6457,7 @@
                   <a:srgbClr val="8A94A6"/>
                 </a:solidFill>
                 <a:latin typeface="Times New Roman"/>
-                <a:ea typeface="Noto Sans CJK SC"/>
+                <a:ea typeface="Noto Serif CJK SC"/>
               </a:rPr>
               <a:t>13</a:t>
             </a:r>
@@ -6263,7 +6497,7 @@
             <a:avLst/>
           </a:prstGeom>
           <a:solidFill>
-            <a:srgbClr val="0B1F3A"/>
+            <a:srgbClr val="FFFFFF"/>
           </a:solidFill>
           <a:ln>
             <a:noFill/>
@@ -6300,14 +6534,14 @@
         </p:nvSpPr>
         <p:spPr>
           <a:xfrm>
-            <a:off x="0" y="6711696"/>
-            <a:ext cx="12191695" cy="146304"/>
-          </a:xfrm>
-          <a:prstGeom prst="rect">
-            <a:avLst/>
-          </a:prstGeom>
-          <a:solidFill>
-            <a:srgbClr val="2F6FED"/>
+            <a:off x="0" y="0"/>
+            <a:ext cx="12191695" cy="109728"/>
+          </a:xfrm>
+          <a:prstGeom prst="rect">
+            <a:avLst/>
+          </a:prstGeom>
+          <a:solidFill>
+            <a:srgbClr val="1F3864"/>
           </a:solidFill>
           <a:ln>
             <a:noFill/>
@@ -6338,14 +6572,102 @@
       </p:sp>
       <p:sp>
         <p:nvSpPr>
-          <p:cNvPr id="4" name="TextBox 3"/>
+          <p:cNvPr id="4" name="Rectangle 3"/>
+          <p:cNvSpPr/>
+          <p:nvPr/>
+        </p:nvSpPr>
+        <p:spPr>
+          <a:xfrm>
+            <a:off x="0" y="6748272"/>
+            <a:ext cx="12191695" cy="109728"/>
+          </a:xfrm>
+          <a:prstGeom prst="rect">
+            <a:avLst/>
+          </a:prstGeom>
+          <a:solidFill>
+            <a:srgbClr val="2F6FED"/>
+          </a:solidFill>
+          <a:ln>
+            <a:noFill/>
+          </a:ln>
+          <a:effectLst/>
+        </p:spPr>
+        <p:style>
+          <a:lnRef idx="1">
+            <a:schemeClr val="accent1"/>
+          </a:lnRef>
+          <a:fillRef idx="3">
+            <a:schemeClr val="accent1"/>
+          </a:fillRef>
+          <a:effectRef idx="2">
+            <a:schemeClr val="accent1"/>
+          </a:effectRef>
+          <a:fontRef idx="minor">
+            <a:schemeClr val="lt1"/>
+          </a:fontRef>
+        </p:style>
+        <p:txBody>
+          <a:bodyPr rtlCol="0" anchor="ctr"/>
+          <a:lstStyle/>
+          <a:p>
+            <a:pPr algn="ctr"/>
+          </a:p>
+        </p:txBody>
+      </p:sp>
+      <p:sp>
+        <p:nvSpPr>
+          <p:cNvPr id="5" name="Rectangle 4"/>
+          <p:cNvSpPr/>
+          <p:nvPr/>
+        </p:nvSpPr>
+        <p:spPr>
+          <a:xfrm>
+            <a:off x="777240" y="2331720"/>
+            <a:ext cx="128016" cy="1371600"/>
+          </a:xfrm>
+          <a:prstGeom prst="rect">
+            <a:avLst/>
+          </a:prstGeom>
+          <a:solidFill>
+            <a:srgbClr val="2F6FED"/>
+          </a:solidFill>
+          <a:ln>
+            <a:noFill/>
+          </a:ln>
+          <a:effectLst/>
+        </p:spPr>
+        <p:style>
+          <a:lnRef idx="1">
+            <a:schemeClr val="accent1"/>
+          </a:lnRef>
+          <a:fillRef idx="3">
+            <a:schemeClr val="accent1"/>
+          </a:fillRef>
+          <a:effectRef idx="2">
+            <a:schemeClr val="accent1"/>
+          </a:effectRef>
+          <a:fontRef idx="minor">
+            <a:schemeClr val="lt1"/>
+          </a:fontRef>
+        </p:style>
+        <p:txBody>
+          <a:bodyPr rtlCol="0" anchor="ctr"/>
+          <a:lstStyle/>
+          <a:p>
+            <a:pPr algn="ctr"/>
+          </a:p>
+        </p:txBody>
+      </p:sp>
+      <p:sp>
+        <p:nvSpPr>
+          <p:cNvPr id="6" name="TextBox 5"/>
           <p:cNvSpPr txBox="1"/>
           <p:nvPr/>
         </p:nvSpPr>
         <p:spPr>
           <a:xfrm>
-            <a:off x="777240" y="1188720"/>
-            <a:ext cx="3657600" cy="1554480"/>
+            <a:off x="1143000" y="1234440"/>
+            <a:ext cx="3657600" cy="1463040"/>
           </a:xfrm>
           <a:prstGeom prst="rect">
             <a:avLst/>
@@ -6362,15 +6684,15 @@
               <a:lnSpc>
                 <a:spcPct val="130000"/>
               </a:lnSpc>
-              <a:defRPr sz="9200"/>
+              <a:defRPr sz="8800"/>
             </a:pPr>
             <a:r>
-              <a:rPr sz="9200" b="1" u="none">
+              <a:rPr sz="8800" b="1" u="none">
                 <a:solidFill>
-                  <a:srgbClr val="2F6FED"/>
+                  <a:srgbClr val="EEF3FB"/>
                 </a:solidFill>
                 <a:latin typeface="Times New Roman"/>
-                <a:ea typeface="Noto Sans CJK SC"/>
+                <a:ea typeface="Noto Serif CJK SC"/>
               </a:rPr>
               <a:t>07</a:t>
             </a:r>
@@ -6379,14 +6701,14 @@
       </p:sp>
       <p:sp>
         <p:nvSpPr>
-          <p:cNvPr id="5" name="TextBox 4"/>
+          <p:cNvPr id="7" name="TextBox 6"/>
           <p:cNvSpPr txBox="1"/>
           <p:nvPr/>
         </p:nvSpPr>
         <p:spPr>
           <a:xfrm>
-            <a:off x="841248" y="2834640"/>
-            <a:ext cx="10180015" cy="1097280"/>
+            <a:off x="1143000" y="2377440"/>
+            <a:ext cx="9905695" cy="1005840"/>
           </a:xfrm>
           <a:prstGeom prst="rect">
             <a:avLst/>
@@ -6408,10 +6730,10 @@
             <a:r>
               <a:rPr sz="4000" b="1" u="none">
                 <a:solidFill>
-                  <a:srgbClr val="FFFFFF"/>
+                  <a:srgbClr val="1F3864"/>
                 </a:solidFill>
                 <a:latin typeface="Times New Roman"/>
-                <a:ea typeface="Noto Sans CJK SC"/>
+                <a:ea typeface="Noto Serif CJK SC"/>
               </a:rPr>
               <a:t>参考答案</a:t>
             </a:r>
@@ -6451,7 +6773,7 @@
             <a:avLst/>
           </a:prstGeom>
           <a:solidFill>
-            <a:srgbClr val="E4EBF7"/>
+            <a:srgbClr val="EAF0FA"/>
           </a:solidFill>
           <a:ln>
             <a:noFill/>
@@ -6495,7 +6817,7 @@
             <a:avLst/>
           </a:prstGeom>
           <a:solidFill>
-            <a:srgbClr val="E4EBF7"/>
+            <a:srgbClr val="EAF0FA"/>
           </a:solidFill>
           <a:ln>
             <a:noFill/>
@@ -6539,7 +6861,7 @@
             <a:avLst/>
           </a:prstGeom>
           <a:solidFill>
-            <a:srgbClr val="E4EBF7"/>
+            <a:srgbClr val="EAF0FA"/>
           </a:solidFill>
           <a:ln>
             <a:noFill/>
@@ -6583,7 +6905,7 @@
             <a:avLst/>
           </a:prstGeom>
           <a:solidFill>
-            <a:srgbClr val="E4EBF7"/>
+            <a:srgbClr val="EAF0FA"/>
           </a:solidFill>
           <a:ln>
             <a:noFill/>
@@ -6627,7 +6949,7 @@
             <a:avLst/>
           </a:prstGeom>
           <a:solidFill>
-            <a:srgbClr val="E4EBF7"/>
+            <a:srgbClr val="EAF0FA"/>
           </a:solidFill>
           <a:ln>
             <a:noFill/>
@@ -6671,7 +6993,7 @@
             <a:avLst/>
           </a:prstGeom>
           <a:solidFill>
-            <a:srgbClr val="E4EBF7"/>
+            <a:srgbClr val="EAF0FA"/>
           </a:solidFill>
           <a:ln>
             <a:noFill/>
@@ -6715,7 +7037,7 @@
             <a:avLst/>
           </a:prstGeom>
           <a:solidFill>
-            <a:srgbClr val="E4EBF7"/>
+            <a:srgbClr val="EAF0FA"/>
           </a:solidFill>
           <a:ln>
             <a:noFill/>
@@ -6759,7 +7081,7 @@
             <a:avLst/>
           </a:prstGeom>
           <a:solidFill>
-            <a:srgbClr val="E4EBF7"/>
+            <a:srgbClr val="EAF0FA"/>
           </a:solidFill>
           <a:ln>
             <a:noFill/>
@@ -6803,7 +7125,7 @@
             <a:avLst/>
           </a:prstGeom>
           <a:solidFill>
-            <a:srgbClr val="E4EBF7"/>
+            <a:srgbClr val="EAF0FA"/>
           </a:solidFill>
           <a:ln>
             <a:noFill/>
@@ -6834,23 +7156,27 @@
       </p:sp>
       <p:sp>
         <p:nvSpPr>
-          <p:cNvPr id="11" name="Rectangle 10"/>
+          <p:cNvPr id="11" name="Rounded Rectangle 10"/>
           <p:cNvSpPr/>
           <p:nvPr/>
         </p:nvSpPr>
         <p:spPr>
           <a:xfrm>
-            <a:off x="0" y="0"/>
-            <a:ext cx="12191695" cy="82296"/>
-          </a:xfrm>
-          <a:prstGeom prst="rect">
-            <a:avLst/>
-          </a:prstGeom>
-          <a:solidFill>
-            <a:srgbClr val="0B1F3A"/>
-          </a:solidFill>
-          <a:ln>
-            <a:noFill/>
+            <a:off x="502920" y="384048"/>
+            <a:ext cx="11185855" cy="749808"/>
+          </a:xfrm>
+          <a:prstGeom prst="roundRect">
+            <a:avLst>
+              <a:gd name="adj" fmla="val 16000"/>
+            </a:avLst>
+          </a:prstGeom>
+          <a:solidFill>
+            <a:srgbClr val="FFFFFF"/>
+          </a:solidFill>
+          <a:ln w="15875">
+            <a:solidFill>
+              <a:srgbClr val="2F6FED"/>
+            </a:solidFill>
           </a:ln>
           <a:effectLst/>
         </p:spPr>
@@ -6878,102 +7204,14 @@
       </p:sp>
       <p:sp>
         <p:nvSpPr>
-          <p:cNvPr id="12" name="Rectangle 11"/>
-          <p:cNvSpPr/>
-          <p:nvPr/>
-        </p:nvSpPr>
-        <p:spPr>
-          <a:xfrm>
-            <a:off x="548640" y="457200"/>
-            <a:ext cx="128016" cy="128016"/>
-          </a:xfrm>
-          <a:prstGeom prst="rect">
-            <a:avLst/>
-          </a:prstGeom>
-          <a:solidFill>
-            <a:srgbClr val="2F6FED"/>
-          </a:solidFill>
-          <a:ln>
-            <a:noFill/>
-          </a:ln>
-          <a:effectLst/>
-        </p:spPr>
-        <p:style>
-          <a:lnRef idx="1">
-            <a:schemeClr val="accent1"/>
-          </a:lnRef>
-          <a:fillRef idx="3">
-            <a:schemeClr val="accent1"/>
-          </a:fillRef>
-          <a:effectRef idx="2">
-            <a:schemeClr val="accent1"/>
-          </a:effectRef>
-          <a:fontRef idx="minor">
-            <a:schemeClr val="lt1"/>
-          </a:fontRef>
-        </p:style>
-        <p:txBody>
-          <a:bodyPr rtlCol="0" anchor="ctr"/>
-          <a:lstStyle/>
-          <a:p>
-            <a:pPr algn="ctr"/>
-          </a:p>
-        </p:txBody>
-      </p:sp>
-      <p:sp>
-        <p:nvSpPr>
-          <p:cNvPr id="13" name="Rectangle 12"/>
-          <p:cNvSpPr/>
-          <p:nvPr/>
-        </p:nvSpPr>
-        <p:spPr>
-          <a:xfrm>
-            <a:off x="548640" y="658368"/>
-            <a:ext cx="128016" cy="128016"/>
-          </a:xfrm>
-          <a:prstGeom prst="rect">
-            <a:avLst/>
-          </a:prstGeom>
-          <a:solidFill>
-            <a:srgbClr val="2F6FED"/>
-          </a:solidFill>
-          <a:ln>
-            <a:noFill/>
-          </a:ln>
-          <a:effectLst/>
-        </p:spPr>
-        <p:style>
-          <a:lnRef idx="1">
-            <a:schemeClr val="accent1"/>
-          </a:lnRef>
-          <a:fillRef idx="3">
-            <a:schemeClr val="accent1"/>
-          </a:fillRef>
-          <a:effectRef idx="2">
-            <a:schemeClr val="accent1"/>
-          </a:effectRef>
-          <a:fontRef idx="minor">
-            <a:schemeClr val="lt1"/>
-          </a:fontRef>
-        </p:style>
-        <p:txBody>
-          <a:bodyPr rtlCol="0" anchor="ctr"/>
-          <a:lstStyle/>
-          <a:p>
-            <a:pPr algn="ctr"/>
-          </a:p>
-        </p:txBody>
-      </p:sp>
-      <p:sp>
-        <p:nvSpPr>
-          <p:cNvPr id="14" name="TextBox 13"/>
+          <p:cNvPr id="12" name="TextBox 11"/>
           <p:cNvSpPr txBox="1"/>
           <p:nvPr/>
         </p:nvSpPr>
         <p:spPr>
           <a:xfrm>
-            <a:off x="841248" y="402336"/>
-            <a:ext cx="9448495" cy="621792"/>
+            <a:off x="868680" y="457200"/>
+            <a:ext cx="8351215" cy="603504"/>
           </a:xfrm>
           <a:prstGeom prst="rect">
             <a:avLst/>
@@ -6995,10 +7233,10 @@
             <a:r>
               <a:rPr sz="2800" b="1" u="none">
                 <a:solidFill>
-                  <a:srgbClr val="0B1F3A"/>
+                  <a:srgbClr val="1F3864"/>
                 </a:solidFill>
                 <a:latin typeface="Times New Roman"/>
-                <a:ea typeface="Noto Sans CJK SC"/>
+                <a:ea typeface="Noto Serif CJK SC"/>
               </a:rPr>
               <a:t>参考答案</a:t>
             </a:r>
@@ -7007,94 +7245,7 @@
       </p:sp>
       <p:sp>
         <p:nvSpPr>
-          <p:cNvPr id="15" name="Rounded Rectangle 14"/>
-          <p:cNvSpPr/>
-          <p:nvPr/>
-        </p:nvSpPr>
-        <p:spPr>
-          <a:xfrm>
-            <a:off x="11039551" y="457200"/>
-            <a:ext cx="649224" cy="365760"/>
-          </a:xfrm>
-          <a:prstGeom prst="roundRect">
-            <a:avLst>
-              <a:gd name="adj" fmla="val 35000"/>
-            </a:avLst>
-          </a:prstGeom>
-          <a:solidFill>
-            <a:srgbClr val="EAF0FB"/>
-          </a:solidFill>
-          <a:ln>
-            <a:noFill/>
-          </a:ln>
-          <a:effectLst/>
-        </p:spPr>
-        <p:style>
-          <a:lnRef idx="1">
-            <a:schemeClr val="accent1"/>
-          </a:lnRef>
-          <a:fillRef idx="3">
-            <a:schemeClr val="accent1"/>
-          </a:fillRef>
-          <a:effectRef idx="2">
-            <a:schemeClr val="accent1"/>
-          </a:effectRef>
-          <a:fontRef idx="minor">
-            <a:schemeClr val="lt1"/>
-          </a:fontRef>
-        </p:style>
-        <p:txBody>
-          <a:bodyPr rtlCol="0" anchor="ctr"/>
-          <a:lstStyle/>
-          <a:p>
-            <a:pPr algn="ctr"/>
-          </a:p>
-        </p:txBody>
-      </p:sp>
-      <p:sp>
-        <p:nvSpPr>
-          <p:cNvPr id="16" name="TextBox 15"/>
-          <p:cNvSpPr txBox="1"/>
-          <p:nvPr/>
-        </p:nvSpPr>
-        <p:spPr>
-          <a:xfrm>
-            <a:off x="11039551" y="475488"/>
-            <a:ext cx="649224" cy="329184"/>
-          </a:xfrm>
-          <a:prstGeom prst="rect">
-            <a:avLst/>
-          </a:prstGeom>
-          <a:noFill/>
-        </p:spPr>
-        <p:txBody>
-          <a:bodyPr wrap="square" anchor="ctr" lIns="54864" rIns="54864" tIns="0" bIns="0">
-            <a:spAutoFit/>
-          </a:bodyPr>
-          <a:lstStyle/>
-          <a:p>
-            <a:pPr algn="ctr">
-              <a:lnSpc>
-                <a:spcPct val="130000"/>
-              </a:lnSpc>
-              <a:defRPr sz="1100"/>
-            </a:pPr>
-            <a:r>
-              <a:rPr sz="1100" b="1" u="none">
-                <a:solidFill>
-                  <a:srgbClr val="2F6FED"/>
-                </a:solidFill>
-                <a:latin typeface="Times New Roman"/>
-                <a:ea typeface="Noto Sans CJK SC"/>
-              </a:rPr>
-              <a:t>答案</a:t>
-            </a:r>
-          </a:p>
-        </p:txBody>
-      </p:sp>
-      <p:sp>
-        <p:nvSpPr>
-          <p:cNvPr id="17" name="TextBox 16"/>
+          <p:cNvPr id="13" name="TextBox 12"/>
           <p:cNvSpPr txBox="1"/>
           <p:nvPr/>
         </p:nvSpPr>
@@ -7123,10 +7274,10 @@
             <a:r>
               <a:rPr sz="2600" b="0" u="none">
                 <a:solidFill>
-                  <a:srgbClr val="16202E"/>
+                  <a:srgbClr val="1A2233"/>
                 </a:solidFill>
                 <a:latin typeface="Times New Roman"/>
-                <a:ea typeface="Noto Sans CJK SC"/>
+                <a:ea typeface="Noto Serif CJK SC"/>
               </a:rPr>
               <a:t>1. 5</a:t>
             </a:r>
@@ -7143,10 +7294,10 @@
             <a:r>
               <a:rPr sz="2600" b="0" u="none">
                 <a:solidFill>
-                  <a:srgbClr val="16202E"/>
+                  <a:srgbClr val="1A2233"/>
                 </a:solidFill>
                 <a:latin typeface="Times New Roman"/>
-                <a:ea typeface="Noto Sans CJK SC"/>
+                <a:ea typeface="Noto Serif CJK SC"/>
               </a:rPr>
               <a:t>2. 点 (1,0)</a:t>
             </a:r>
@@ -7155,7 +7306,7 @@
       </p:sp>
       <p:sp>
         <p:nvSpPr>
-          <p:cNvPr id="18" name="Rectangle 17"/>
+          <p:cNvPr id="14" name="Rectangle 13"/>
           <p:cNvSpPr/>
           <p:nvPr/>
         </p:nvSpPr>
@@ -7199,14 +7350,14 @@
       </p:sp>
       <p:sp>
         <p:nvSpPr>
-          <p:cNvPr id="19" name="TextBox 18"/>
+          <p:cNvPr id="15" name="TextBox 14"/>
           <p:cNvSpPr txBox="1"/>
           <p:nvPr/>
         </p:nvSpPr>
         <p:spPr>
           <a:xfrm>
             <a:off x="548640" y="6345936"/>
-            <a:ext cx="8595360" cy="274320"/>
+            <a:ext cx="7498079" cy="274320"/>
           </a:xfrm>
           <a:prstGeom prst="rect">
             <a:avLst/>
@@ -7231,7 +7382,7 @@
                   <a:srgbClr val="8A94A6"/>
                 </a:solidFill>
                 <a:latin typeface="Times New Roman"/>
-                <a:ea typeface="Noto Sans CJK SC"/>
+                <a:ea typeface="Noto Serif CJK SC"/>
               </a:rPr>
               <a:t>胶州四中 · 第4节 函数的对称性及应用</a:t>
             </a:r>
@@ -7240,7 +7391,7 @@
       </p:sp>
       <p:sp>
         <p:nvSpPr>
-          <p:cNvPr id="20" name="TextBox 19"/>
+          <p:cNvPr id="16" name="TextBox 15"/>
           <p:cNvSpPr txBox="1"/>
           <p:nvPr/>
         </p:nvSpPr>
@@ -7272,7 +7423,7 @@
                   <a:srgbClr val="8A94A6"/>
                 </a:solidFill>
                 <a:latin typeface="Times New Roman"/>
-                <a:ea typeface="Noto Sans CJK SC"/>
+                <a:ea typeface="Noto Serif CJK SC"/>
               </a:rPr>
               <a:t>15</a:t>
             </a:r>
@@ -7312,7 +7463,7 @@
             <a:avLst/>
           </a:prstGeom>
           <a:solidFill>
-            <a:srgbClr val="EAF0FB"/>
+            <a:srgbClr val="EEF3FB"/>
           </a:solidFill>
           <a:ln>
             <a:noFill/>
@@ -7356,7 +7507,7 @@
             <a:avLst/>
           </a:prstGeom>
           <a:solidFill>
-            <a:srgbClr val="0B1F3A"/>
+            <a:srgbClr val="1F3864"/>
           </a:solidFill>
           <a:ln>
             <a:noFill/>
@@ -7437,7 +7588,7 @@
         </p:nvSpPr>
         <p:spPr>
           <a:xfrm>
-            <a:off x="777240" y="731520"/>
+            <a:off x="777240" y="1005840"/>
             <a:ext cx="10637215" cy="822960"/>
           </a:xfrm>
           <a:prstGeom prst="rect">
@@ -7460,10 +7611,10 @@
             <a:r>
               <a:rPr sz="3800" b="1" u="none">
                 <a:solidFill>
-                  <a:srgbClr val="0B1F3A"/>
+                  <a:srgbClr val="1F3864"/>
                 </a:solidFill>
                 <a:latin typeface="Times New Roman"/>
-                <a:ea typeface="Noto Sans CJK SC"/>
+                <a:ea typeface="Noto Serif CJK SC"/>
               </a:rPr>
               <a:t>本节课小结</a:t>
             </a:r>
@@ -7478,8 +7629,8 @@
         </p:nvSpPr>
         <p:spPr>
           <a:xfrm>
-            <a:off x="868680" y="1783080"/>
-            <a:ext cx="10454335" cy="4251960"/>
+            <a:off x="868680" y="3136392"/>
+            <a:ext cx="10454335" cy="2715768"/>
           </a:xfrm>
           <a:prstGeom prst="rect">
             <a:avLst/>
@@ -7504,17 +7655,17 @@
                   <a:srgbClr val="2F6FED"/>
                 </a:solidFill>
                 <a:latin typeface="Times New Roman"/>
-                <a:ea typeface="Noto Sans CJK SC"/>
+                <a:ea typeface="Noto Serif CJK SC"/>
               </a:rPr>
               <a:t>✔ </a:t>
             </a:r>
             <a:r>
               <a:rPr sz="2300" b="0" u="none">
                 <a:solidFill>
-                  <a:srgbClr val="16202E"/>
+                  <a:srgbClr val="1A2233"/>
                 </a:solidFill>
                 <a:latin typeface="Times New Roman"/>
-                <a:ea typeface="Noto Sans CJK SC"/>
+                <a:ea typeface="Noto Serif CJK SC"/>
               </a:rPr>
               <a:t>能通过平移分析得出一般的轴对称与中心对称公式。</a:t>
             </a:r>
@@ -7534,17 +7685,17 @@
                   <a:srgbClr val="2F6FED"/>
                 </a:solidFill>
                 <a:latin typeface="Times New Roman"/>
-                <a:ea typeface="Noto Sans CJK SC"/>
+                <a:ea typeface="Noto Serif CJK SC"/>
               </a:rPr>
               <a:t>✔ </a:t>
             </a:r>
             <a:r>
               <a:rPr sz="2300" b="0" u="none">
                 <a:solidFill>
-                  <a:srgbClr val="16202E"/>
+                  <a:srgbClr val="1A2233"/>
                 </a:solidFill>
                 <a:latin typeface="Times New Roman"/>
-                <a:ea typeface="Noto Sans CJK SC"/>
+                <a:ea typeface="Noto Serif CJK SC"/>
               </a:rPr>
               <a:t>会由对称性推导周期性，解决「对称+单调」的综合问题。</a:t>
             </a:r>
@@ -7585,7 +7736,7 @@
                   <a:srgbClr val="64748B"/>
                 </a:solidFill>
                 <a:latin typeface="Times New Roman"/>
-                <a:ea typeface="Noto Sans CJK SC"/>
+                <a:ea typeface="Noto Serif CJK SC"/>
               </a:rPr>
               <a:t>胶州四中</a:t>
             </a:r>
@@ -7626,7 +7777,7 @@
                   <a:srgbClr val="64748B"/>
                 </a:solidFill>
                 <a:latin typeface="Times New Roman"/>
-                <a:ea typeface="Noto Sans CJK SC"/>
+                <a:ea typeface="Noto Serif CJK SC"/>
               </a:rPr>
               <a:t>16</a:t>
             </a:r>
@@ -7666,7 +7817,7 @@
             <a:avLst/>
           </a:prstGeom>
           <a:solidFill>
-            <a:srgbClr val="0B1F3A"/>
+            <a:srgbClr val="FFFFFF"/>
           </a:solidFill>
           <a:ln>
             <a:noFill/>
@@ -7703,14 +7854,14 @@
         </p:nvSpPr>
         <p:spPr>
           <a:xfrm>
-            <a:off x="0" y="6711696"/>
-            <a:ext cx="12191695" cy="146304"/>
-          </a:xfrm>
-          <a:prstGeom prst="rect">
-            <a:avLst/>
-          </a:prstGeom>
-          <a:solidFill>
-            <a:srgbClr val="2F6FED"/>
+            <a:off x="0" y="0"/>
+            <a:ext cx="12191695" cy="109728"/>
+          </a:xfrm>
+          <a:prstGeom prst="rect">
+            <a:avLst/>
+          </a:prstGeom>
+          <a:solidFill>
+            <a:srgbClr val="1F3864"/>
           </a:solidFill>
           <a:ln>
             <a:noFill/>
@@ -7741,14 +7892,102 @@
       </p:sp>
       <p:sp>
         <p:nvSpPr>
-          <p:cNvPr id="4" name="TextBox 3"/>
+          <p:cNvPr id="4" name="Rectangle 3"/>
+          <p:cNvSpPr/>
+          <p:nvPr/>
+        </p:nvSpPr>
+        <p:spPr>
+          <a:xfrm>
+            <a:off x="0" y="6748272"/>
+            <a:ext cx="12191695" cy="109728"/>
+          </a:xfrm>
+          <a:prstGeom prst="rect">
+            <a:avLst/>
+          </a:prstGeom>
+          <a:solidFill>
+            <a:srgbClr val="2F6FED"/>
+          </a:solidFill>
+          <a:ln>
+            <a:noFill/>
+          </a:ln>
+          <a:effectLst/>
+        </p:spPr>
+        <p:style>
+          <a:lnRef idx="1">
+            <a:schemeClr val="accent1"/>
+          </a:lnRef>
+          <a:fillRef idx="3">
+            <a:schemeClr val="accent1"/>
+          </a:fillRef>
+          <a:effectRef idx="2">
+            <a:schemeClr val="accent1"/>
+          </a:effectRef>
+          <a:fontRef idx="minor">
+            <a:schemeClr val="lt1"/>
+          </a:fontRef>
+        </p:style>
+        <p:txBody>
+          <a:bodyPr rtlCol="0" anchor="ctr"/>
+          <a:lstStyle/>
+          <a:p>
+            <a:pPr algn="ctr"/>
+          </a:p>
+        </p:txBody>
+      </p:sp>
+      <p:sp>
+        <p:nvSpPr>
+          <p:cNvPr id="5" name="Rectangle 4"/>
+          <p:cNvSpPr/>
+          <p:nvPr/>
+        </p:nvSpPr>
+        <p:spPr>
+          <a:xfrm>
+            <a:off x="777240" y="2331720"/>
+            <a:ext cx="128016" cy="1371600"/>
+          </a:xfrm>
+          <a:prstGeom prst="rect">
+            <a:avLst/>
+          </a:prstGeom>
+          <a:solidFill>
+            <a:srgbClr val="2F6FED"/>
+          </a:solidFill>
+          <a:ln>
+            <a:noFill/>
+          </a:ln>
+          <a:effectLst/>
+        </p:spPr>
+        <p:style>
+          <a:lnRef idx="1">
+            <a:schemeClr val="accent1"/>
+          </a:lnRef>
+          <a:fillRef idx="3">
+            <a:schemeClr val="accent1"/>
+          </a:fillRef>
+          <a:effectRef idx="2">
+            <a:schemeClr val="accent1"/>
+          </a:effectRef>
+          <a:fontRef idx="minor">
+            <a:schemeClr val="lt1"/>
+          </a:fontRef>
+        </p:style>
+        <p:txBody>
+          <a:bodyPr rtlCol="0" anchor="ctr"/>
+          <a:lstStyle/>
+          <a:p>
+            <a:pPr algn="ctr"/>
+          </a:p>
+        </p:txBody>
+      </p:sp>
+      <p:sp>
+        <p:nvSpPr>
+          <p:cNvPr id="6" name="TextBox 5"/>
           <p:cNvSpPr txBox="1"/>
           <p:nvPr/>
         </p:nvSpPr>
         <p:spPr>
           <a:xfrm>
-            <a:off x="777240" y="1188720"/>
-            <a:ext cx="3657600" cy="1554480"/>
+            <a:off x="1143000" y="1234440"/>
+            <a:ext cx="3657600" cy="1463040"/>
           </a:xfrm>
           <a:prstGeom prst="rect">
             <a:avLst/>
@@ -7765,15 +8004,15 @@
               <a:lnSpc>
                 <a:spcPct val="130000"/>
               </a:lnSpc>
-              <a:defRPr sz="9200"/>
+              <a:defRPr sz="8800"/>
             </a:pPr>
             <a:r>
-              <a:rPr sz="9200" b="1" u="none">
+              <a:rPr sz="8800" b="1" u="none">
                 <a:solidFill>
-                  <a:srgbClr val="2F6FED"/>
+                  <a:srgbClr val="EEF3FB"/>
                 </a:solidFill>
                 <a:latin typeface="Times New Roman"/>
-                <a:ea typeface="Noto Sans CJK SC"/>
+                <a:ea typeface="Noto Serif CJK SC"/>
               </a:rPr>
               <a:t>01</a:t>
             </a:r>
@@ -7782,14 +8021,14 @@
       </p:sp>
       <p:sp>
         <p:nvSpPr>
-          <p:cNvPr id="5" name="TextBox 4"/>
+          <p:cNvPr id="7" name="TextBox 6"/>
           <p:cNvSpPr txBox="1"/>
           <p:nvPr/>
         </p:nvSpPr>
         <p:spPr>
           <a:xfrm>
-            <a:off x="841248" y="2834640"/>
-            <a:ext cx="10180015" cy="1097280"/>
+            <a:off x="1143000" y="2377440"/>
+            <a:ext cx="9905695" cy="1005840"/>
           </a:xfrm>
           <a:prstGeom prst="rect">
             <a:avLst/>
@@ -7811,10 +8050,10 @@
             <a:r>
               <a:rPr sz="4000" b="1" u="none">
                 <a:solidFill>
-                  <a:srgbClr val="FFFFFF"/>
+                  <a:srgbClr val="1F3864"/>
                 </a:solidFill>
                 <a:latin typeface="Times New Roman"/>
-                <a:ea typeface="Noto Sans CJK SC"/>
+                <a:ea typeface="Noto Serif CJK SC"/>
               </a:rPr>
               <a:t>学习目标</a:t>
             </a:r>
@@ -7823,14 +8062,14 @@
       </p:sp>
       <p:sp>
         <p:nvSpPr>
-          <p:cNvPr id="6" name="Rounded Rectangle 5"/>
+          <p:cNvPr id="8" name="Rounded Rectangle 7"/>
           <p:cNvSpPr/>
           <p:nvPr/>
         </p:nvSpPr>
         <p:spPr>
           <a:xfrm>
-            <a:off x="11688775" y="2011680"/>
-            <a:ext cx="365760" cy="2377440"/>
+            <a:off x="777240" y="2011680"/>
+            <a:ext cx="384048" cy="868680"/>
           </a:xfrm>
           <a:prstGeom prst="roundRect">
             <a:avLst>
@@ -7869,14 +8108,14 @@
       </p:sp>
       <p:sp>
         <p:nvSpPr>
-          <p:cNvPr id="7" name="TextBox 6"/>
+          <p:cNvPr id="9" name="TextBox 8"/>
           <p:cNvSpPr txBox="1"/>
           <p:nvPr/>
         </p:nvSpPr>
         <p:spPr>
           <a:xfrm>
-            <a:off x="11688775" y="2103120"/>
-            <a:ext cx="365760" cy="2194560"/>
+            <a:off x="1280160" y="2011680"/>
+            <a:ext cx="2011680" cy="384048"/>
           </a:xfrm>
           <a:prstGeom prst="rect">
             <a:avLst/>
@@ -7884,12 +8123,12 @@
           <a:noFill/>
         </p:spPr>
         <p:txBody>
-          <a:bodyPr wrap="square" anchor="ctr" lIns="54864" rIns="54864" tIns="0" bIns="0" vert="eaVert">
+          <a:bodyPr wrap="square" anchor="t" lIns="54864" rIns="54864" tIns="0" bIns="0">
             <a:spAutoFit/>
           </a:bodyPr>
           <a:lstStyle/>
           <a:p>
-            <a:pPr algn="ctr">
+            <a:pPr algn="l">
               <a:lnSpc>
                 <a:spcPct val="130000"/>
               </a:lnSpc>
@@ -7898,10 +8137,10 @@
             <a:r>
               <a:rPr sz="1500" b="1" u="none">
                 <a:solidFill>
-                  <a:srgbClr val="FFFFFF"/>
+                  <a:srgbClr val="2F6FED"/>
                 </a:solidFill>
                 <a:latin typeface="Times New Roman"/>
-                <a:ea typeface="Noto Sans CJK SC"/>
+                <a:ea typeface="Noto Serif CJK SC"/>
               </a:rPr>
               <a:t>导入</a:t>
             </a:r>
@@ -7941,7 +8180,7 @@
             <a:avLst/>
           </a:prstGeom>
           <a:solidFill>
-            <a:srgbClr val="E4EBF7"/>
+            <a:srgbClr val="EAF0FA"/>
           </a:solidFill>
           <a:ln>
             <a:noFill/>
@@ -7985,7 +8224,7 @@
             <a:avLst/>
           </a:prstGeom>
           <a:solidFill>
-            <a:srgbClr val="E4EBF7"/>
+            <a:srgbClr val="EAF0FA"/>
           </a:solidFill>
           <a:ln>
             <a:noFill/>
@@ -8029,7 +8268,7 @@
             <a:avLst/>
           </a:prstGeom>
           <a:solidFill>
-            <a:srgbClr val="E4EBF7"/>
+            <a:srgbClr val="EAF0FA"/>
           </a:solidFill>
           <a:ln>
             <a:noFill/>
@@ -8073,7 +8312,7 @@
             <a:avLst/>
           </a:prstGeom>
           <a:solidFill>
-            <a:srgbClr val="E4EBF7"/>
+            <a:srgbClr val="EAF0FA"/>
           </a:solidFill>
           <a:ln>
             <a:noFill/>
@@ -8117,7 +8356,7 @@
             <a:avLst/>
           </a:prstGeom>
           <a:solidFill>
-            <a:srgbClr val="E4EBF7"/>
+            <a:srgbClr val="EAF0FA"/>
           </a:solidFill>
           <a:ln>
             <a:noFill/>
@@ -8161,7 +8400,7 @@
             <a:avLst/>
           </a:prstGeom>
           <a:solidFill>
-            <a:srgbClr val="E4EBF7"/>
+            <a:srgbClr val="EAF0FA"/>
           </a:solidFill>
           <a:ln>
             <a:noFill/>
@@ -8205,7 +8444,7 @@
             <a:avLst/>
           </a:prstGeom>
           <a:solidFill>
-            <a:srgbClr val="E4EBF7"/>
+            <a:srgbClr val="EAF0FA"/>
           </a:solidFill>
           <a:ln>
             <a:noFill/>
@@ -8249,7 +8488,7 @@
             <a:avLst/>
           </a:prstGeom>
           <a:solidFill>
-            <a:srgbClr val="E4EBF7"/>
+            <a:srgbClr val="EAF0FA"/>
           </a:solidFill>
           <a:ln>
             <a:noFill/>
@@ -8293,7 +8532,7 @@
             <a:avLst/>
           </a:prstGeom>
           <a:solidFill>
-            <a:srgbClr val="E4EBF7"/>
+            <a:srgbClr val="EAF0FA"/>
           </a:solidFill>
           <a:ln>
             <a:noFill/>
@@ -8324,23 +8563,27 @@
       </p:sp>
       <p:sp>
         <p:nvSpPr>
-          <p:cNvPr id="11" name="Rectangle 10"/>
+          <p:cNvPr id="11" name="Rounded Rectangle 10"/>
           <p:cNvSpPr/>
           <p:nvPr/>
         </p:nvSpPr>
         <p:spPr>
           <a:xfrm>
-            <a:off x="0" y="0"/>
-            <a:ext cx="12191695" cy="82296"/>
-          </a:xfrm>
-          <a:prstGeom prst="rect">
-            <a:avLst/>
-          </a:prstGeom>
-          <a:solidFill>
-            <a:srgbClr val="0B1F3A"/>
-          </a:solidFill>
-          <a:ln>
-            <a:noFill/>
+            <a:off x="502920" y="384048"/>
+            <a:ext cx="11185855" cy="749808"/>
+          </a:xfrm>
+          <a:prstGeom prst="roundRect">
+            <a:avLst>
+              <a:gd name="adj" fmla="val 16000"/>
+            </a:avLst>
+          </a:prstGeom>
+          <a:solidFill>
+            <a:srgbClr val="FFFFFF"/>
+          </a:solidFill>
+          <a:ln w="15875">
+            <a:solidFill>
+              <a:srgbClr val="2F6FED"/>
+            </a:solidFill>
           </a:ln>
           <a:effectLst/>
         </p:spPr>
@@ -8368,102 +8611,14 @@
       </p:sp>
       <p:sp>
         <p:nvSpPr>
-          <p:cNvPr id="12" name="Rectangle 11"/>
-          <p:cNvSpPr/>
-          <p:nvPr/>
-        </p:nvSpPr>
-        <p:spPr>
-          <a:xfrm>
-            <a:off x="548640" y="457200"/>
-            <a:ext cx="128016" cy="128016"/>
-          </a:xfrm>
-          <a:prstGeom prst="rect">
-            <a:avLst/>
-          </a:prstGeom>
-          <a:solidFill>
-            <a:srgbClr val="2F6FED"/>
-          </a:solidFill>
-          <a:ln>
-            <a:noFill/>
-          </a:ln>
-          <a:effectLst/>
-        </p:spPr>
-        <p:style>
-          <a:lnRef idx="1">
-            <a:schemeClr val="accent1"/>
-          </a:lnRef>
-          <a:fillRef idx="3">
-            <a:schemeClr val="accent1"/>
-          </a:fillRef>
-          <a:effectRef idx="2">
-            <a:schemeClr val="accent1"/>
-          </a:effectRef>
-          <a:fontRef idx="minor">
-            <a:schemeClr val="lt1"/>
-          </a:fontRef>
-        </p:style>
-        <p:txBody>
-          <a:bodyPr rtlCol="0" anchor="ctr"/>
-          <a:lstStyle/>
-          <a:p>
-            <a:pPr algn="ctr"/>
-          </a:p>
-        </p:txBody>
-      </p:sp>
-      <p:sp>
-        <p:nvSpPr>
-          <p:cNvPr id="13" name="Rectangle 12"/>
-          <p:cNvSpPr/>
-          <p:nvPr/>
-        </p:nvSpPr>
-        <p:spPr>
-          <a:xfrm>
-            <a:off x="548640" y="658368"/>
-            <a:ext cx="128016" cy="128016"/>
-          </a:xfrm>
-          <a:prstGeom prst="rect">
-            <a:avLst/>
-          </a:prstGeom>
-          <a:solidFill>
-            <a:srgbClr val="2F6FED"/>
-          </a:solidFill>
-          <a:ln>
-            <a:noFill/>
-          </a:ln>
-          <a:effectLst/>
-        </p:spPr>
-        <p:style>
-          <a:lnRef idx="1">
-            <a:schemeClr val="accent1"/>
-          </a:lnRef>
-          <a:fillRef idx="3">
-            <a:schemeClr val="accent1"/>
-          </a:fillRef>
-          <a:effectRef idx="2">
-            <a:schemeClr val="accent1"/>
-          </a:effectRef>
-          <a:fontRef idx="minor">
-            <a:schemeClr val="lt1"/>
-          </a:fontRef>
-        </p:style>
-        <p:txBody>
-          <a:bodyPr rtlCol="0" anchor="ctr"/>
-          <a:lstStyle/>
-          <a:p>
-            <a:pPr algn="ctr"/>
-          </a:p>
-        </p:txBody>
-      </p:sp>
-      <p:sp>
-        <p:nvSpPr>
-          <p:cNvPr id="14" name="TextBox 13"/>
+          <p:cNvPr id="12" name="TextBox 11"/>
           <p:cNvSpPr txBox="1"/>
           <p:nvPr/>
         </p:nvSpPr>
         <p:spPr>
           <a:xfrm>
-            <a:off x="841248" y="402336"/>
-            <a:ext cx="9448495" cy="621792"/>
+            <a:off x="868680" y="457200"/>
+            <a:ext cx="8351215" cy="603504"/>
           </a:xfrm>
           <a:prstGeom prst="rect">
             <a:avLst/>
@@ -8485,10 +8640,10 @@
             <a:r>
               <a:rPr sz="2800" b="1" u="none">
                 <a:solidFill>
-                  <a:srgbClr val="0B1F3A"/>
+                  <a:srgbClr val="1F3864"/>
                 </a:solidFill>
                 <a:latin typeface="Times New Roman"/>
-                <a:ea typeface="Noto Sans CJK SC"/>
+                <a:ea typeface="Noto Serif CJK SC"/>
               </a:rPr>
               <a:t>学习目标</a:t>
             </a:r>
@@ -8497,7 +8652,7 @@
       </p:sp>
       <p:sp>
         <p:nvSpPr>
-          <p:cNvPr id="15" name="Rounded Rectangle 14"/>
+          <p:cNvPr id="13" name="Rounded Rectangle 12"/>
           <p:cNvSpPr/>
           <p:nvPr/>
         </p:nvSpPr>
@@ -8512,7 +8667,7 @@
             </a:avLst>
           </a:prstGeom>
           <a:solidFill>
-            <a:srgbClr val="0B1F3A"/>
+            <a:srgbClr val="1F3864"/>
           </a:solidFill>
           <a:ln>
             <a:noFill/>
@@ -8543,7 +8698,7 @@
       </p:sp>
       <p:sp>
         <p:nvSpPr>
-          <p:cNvPr id="16" name="TextBox 15"/>
+          <p:cNvPr id="14" name="TextBox 13"/>
           <p:cNvSpPr txBox="1"/>
           <p:nvPr/>
         </p:nvSpPr>
@@ -8575,7 +8730,7 @@
                   <a:srgbClr val="FFFFFF"/>
                 </a:solidFill>
                 <a:latin typeface="Times New Roman"/>
-                <a:ea typeface="Noto Sans CJK SC"/>
+                <a:ea typeface="Noto Serif CJK SC"/>
               </a:rPr>
               <a:t>知识梳理</a:t>
             </a:r>
@@ -8584,7 +8739,7 @@
       </p:sp>
       <p:sp>
         <p:nvSpPr>
-          <p:cNvPr id="17" name="TextBox 16"/>
+          <p:cNvPr id="15" name="TextBox 14"/>
           <p:cNvSpPr txBox="1"/>
           <p:nvPr/>
         </p:nvSpPr>
@@ -8616,17 +8771,17 @@
                   <a:srgbClr val="2F6FED"/>
                 </a:solidFill>
                 <a:latin typeface="Times New Roman"/>
-                <a:ea typeface="Noto Sans CJK SC"/>
+                <a:ea typeface="Noto Serif CJK SC"/>
               </a:rPr>
               <a:t>▪ </a:t>
             </a:r>
             <a:r>
               <a:rPr sz="2600" b="0" u="none">
                 <a:solidFill>
-                  <a:srgbClr val="16202E"/>
+                  <a:srgbClr val="1A2233"/>
                 </a:solidFill>
                 <a:latin typeface="Times New Roman"/>
-                <a:ea typeface="Noto Sans CJK SC"/>
+                <a:ea typeface="Noto Serif CJK SC"/>
               </a:rPr>
               <a:t>能通过平移分析得出一般的轴对称与中心对称公式。</a:t>
             </a:r>
@@ -8646,17 +8801,17 @@
                   <a:srgbClr val="2F6FED"/>
                 </a:solidFill>
                 <a:latin typeface="Times New Roman"/>
-                <a:ea typeface="Noto Sans CJK SC"/>
+                <a:ea typeface="Noto Serif CJK SC"/>
               </a:rPr>
               <a:t>▪ </a:t>
             </a:r>
             <a:r>
               <a:rPr sz="2600" b="0" u="none">
                 <a:solidFill>
-                  <a:srgbClr val="16202E"/>
+                  <a:srgbClr val="1A2233"/>
                 </a:solidFill>
                 <a:latin typeface="Times New Roman"/>
-                <a:ea typeface="Noto Sans CJK SC"/>
+                <a:ea typeface="Noto Serif CJK SC"/>
               </a:rPr>
               <a:t>会由对称性推导周期性，解决「对称+单调」的综合问题。</a:t>
             </a:r>
@@ -8665,7 +8820,7 @@
       </p:sp>
       <p:sp>
         <p:nvSpPr>
-          <p:cNvPr id="18" name="Rectangle 17"/>
+          <p:cNvPr id="16" name="Rectangle 15"/>
           <p:cNvSpPr/>
           <p:nvPr/>
         </p:nvSpPr>
@@ -8709,14 +8864,14 @@
       </p:sp>
       <p:sp>
         <p:nvSpPr>
-          <p:cNvPr id="19" name="TextBox 18"/>
+          <p:cNvPr id="17" name="TextBox 16"/>
           <p:cNvSpPr txBox="1"/>
           <p:nvPr/>
         </p:nvSpPr>
         <p:spPr>
           <a:xfrm>
             <a:off x="548640" y="6345936"/>
-            <a:ext cx="8595360" cy="274320"/>
+            <a:ext cx="7498079" cy="274320"/>
           </a:xfrm>
           <a:prstGeom prst="rect">
             <a:avLst/>
@@ -8741,7 +8896,7 @@
                   <a:srgbClr val="8A94A6"/>
                 </a:solidFill>
                 <a:latin typeface="Times New Roman"/>
-                <a:ea typeface="Noto Sans CJK SC"/>
+                <a:ea typeface="Noto Serif CJK SC"/>
               </a:rPr>
               <a:t>胶州四中 · 第4节 函数的对称性及应用</a:t>
             </a:r>
@@ -8750,7 +8905,7 @@
       </p:sp>
       <p:sp>
         <p:nvSpPr>
-          <p:cNvPr id="20" name="TextBox 19"/>
+          <p:cNvPr id="18" name="TextBox 17"/>
           <p:cNvSpPr txBox="1"/>
           <p:nvPr/>
         </p:nvSpPr>
@@ -8782,7 +8937,7 @@
                   <a:srgbClr val="8A94A6"/>
                 </a:solidFill>
                 <a:latin typeface="Times New Roman"/>
-                <a:ea typeface="Noto Sans CJK SC"/>
+                <a:ea typeface="Noto Serif CJK SC"/>
               </a:rPr>
               <a:t>3</a:t>
             </a:r>
@@ -8816,13 +8971,13 @@
         <p:spPr>
           <a:xfrm>
             <a:off x="0" y="0"/>
-            <a:ext cx="12191695" cy="822960"/>
-          </a:xfrm>
-          <a:prstGeom prst="rect">
-            <a:avLst/>
-          </a:prstGeom>
-          <a:solidFill>
-            <a:srgbClr val="0B1F3A"/>
+            <a:ext cx="12191695" cy="82296"/>
+          </a:xfrm>
+          <a:prstGeom prst="rect">
+            <a:avLst/>
+          </a:prstGeom>
+          <a:solidFill>
+            <a:srgbClr val="1F3864"/>
           </a:solidFill>
           <a:ln>
             <a:noFill/>
@@ -8853,58 +9008,14 @@
       </p:sp>
       <p:sp>
         <p:nvSpPr>
-          <p:cNvPr id="3" name="Rectangle 2"/>
-          <p:cNvSpPr/>
-          <p:nvPr/>
-        </p:nvSpPr>
-        <p:spPr>
-          <a:xfrm>
-            <a:off x="0" y="822960"/>
-            <a:ext cx="12191695" cy="45720"/>
-          </a:xfrm>
-          <a:prstGeom prst="rect">
-            <a:avLst/>
-          </a:prstGeom>
-          <a:solidFill>
-            <a:srgbClr val="2F6FED"/>
-          </a:solidFill>
-          <a:ln>
-            <a:noFill/>
-          </a:ln>
-          <a:effectLst/>
-        </p:spPr>
-        <p:style>
-          <a:lnRef idx="1">
-            <a:schemeClr val="accent1"/>
-          </a:lnRef>
-          <a:fillRef idx="3">
-            <a:schemeClr val="accent1"/>
-          </a:fillRef>
-          <a:effectRef idx="2">
-            <a:schemeClr val="accent1"/>
-          </a:effectRef>
-          <a:fontRef idx="minor">
-            <a:schemeClr val="lt1"/>
-          </a:fontRef>
-        </p:style>
-        <p:txBody>
-          <a:bodyPr rtlCol="0" anchor="ctr"/>
-          <a:lstStyle/>
-          <a:p>
-            <a:pPr algn="ctr"/>
-          </a:p>
-        </p:txBody>
-      </p:sp>
-      <p:sp>
-        <p:nvSpPr>
-          <p:cNvPr id="4" name="TextBox 3"/>
+          <p:cNvPr id="3" name="TextBox 2"/>
           <p:cNvSpPr txBox="1"/>
           <p:nvPr/>
         </p:nvSpPr>
         <p:spPr>
           <a:xfrm>
-            <a:off x="548640" y="137160"/>
-            <a:ext cx="8442656" cy="548640"/>
+            <a:off x="548640" y="292608"/>
+            <a:ext cx="7985455" cy="566928"/>
           </a:xfrm>
           <a:prstGeom prst="rect">
             <a:avLst/>
@@ -8926,10 +9037,10 @@
             <a:r>
               <a:rPr sz="2600" b="1" u="none">
                 <a:solidFill>
-                  <a:srgbClr val="FFFFFF"/>
+                  <a:srgbClr val="1F3864"/>
                 </a:solidFill>
                 <a:latin typeface="Times New Roman"/>
-                <a:ea typeface="Noto Sans CJK SC"/>
+                <a:ea typeface="Noto Serif CJK SC"/>
               </a:rPr>
               <a:t>知识诊断自测</a:t>
             </a:r>
@@ -8938,13 +9049,13 @@
       </p:sp>
       <p:sp>
         <p:nvSpPr>
-          <p:cNvPr id="5" name="Rounded Rectangle 4"/>
+          <p:cNvPr id="4" name="Rounded Rectangle 3"/>
           <p:cNvSpPr/>
           <p:nvPr/>
         </p:nvSpPr>
         <p:spPr>
           <a:xfrm>
-            <a:off x="10966399" y="219456"/>
+            <a:off x="10966399" y="384048"/>
             <a:ext cx="676656" cy="365760"/>
           </a:xfrm>
           <a:prstGeom prst="roundRect">
@@ -8953,7 +9064,7 @@
             </a:avLst>
           </a:prstGeom>
           <a:solidFill>
-            <a:srgbClr val="2E4A78"/>
+            <a:srgbClr val="C00000"/>
           </a:solidFill>
           <a:ln>
             <a:noFill/>
@@ -8984,13 +9095,13 @@
       </p:sp>
       <p:sp>
         <p:nvSpPr>
-          <p:cNvPr id="6" name="TextBox 5"/>
+          <p:cNvPr id="5" name="TextBox 4"/>
           <p:cNvSpPr txBox="1"/>
           <p:nvPr/>
         </p:nvSpPr>
         <p:spPr>
           <a:xfrm>
-            <a:off x="10966399" y="237744"/>
+            <a:off x="10966399" y="402336"/>
             <a:ext cx="676656" cy="329184"/>
           </a:xfrm>
           <a:prstGeom prst="rect">
@@ -9016,10 +9127,54 @@
                   <a:srgbClr val="FFFFFF"/>
                 </a:solidFill>
                 <a:latin typeface="Times New Roman"/>
-                <a:ea typeface="Noto Sans CJK SC"/>
+                <a:ea typeface="Noto Serif CJK SC"/>
               </a:rPr>
               <a:t>练习</a:t>
             </a:r>
+          </a:p>
+        </p:txBody>
+      </p:sp>
+      <p:sp>
+        <p:nvSpPr>
+          <p:cNvPr id="6" name="Rectangle 5"/>
+          <p:cNvSpPr/>
+          <p:nvPr/>
+        </p:nvSpPr>
+        <p:spPr>
+          <a:xfrm>
+            <a:off x="548640" y="950976"/>
+            <a:ext cx="11094415" cy="9525"/>
+          </a:xfrm>
+          <a:prstGeom prst="rect">
+            <a:avLst/>
+          </a:prstGeom>
+          <a:solidFill>
+            <a:srgbClr val="D8DEE8"/>
+          </a:solidFill>
+          <a:ln>
+            <a:noFill/>
+          </a:ln>
+          <a:effectLst/>
+        </p:spPr>
+        <p:style>
+          <a:lnRef idx="1">
+            <a:schemeClr val="accent1"/>
+          </a:lnRef>
+          <a:fillRef idx="3">
+            <a:schemeClr val="accent1"/>
+          </a:fillRef>
+          <a:effectRef idx="2">
+            <a:schemeClr val="accent1"/>
+          </a:effectRef>
+          <a:fontRef idx="minor">
+            <a:schemeClr val="lt1"/>
+          </a:fontRef>
+        </p:style>
+        <p:txBody>
+          <a:bodyPr rtlCol="0" anchor="ctr"/>
+          <a:lstStyle/>
+          <a:p>
+            <a:pPr algn="ctr"/>
           </a:p>
         </p:txBody>
       </p:sp>
@@ -9054,10 +9209,10 @@
             <a:r>
               <a:rPr sz="2200" b="0" u="none">
                 <a:solidFill>
-                  <a:srgbClr val="16202E"/>
+                  <a:srgbClr val="1A2233"/>
                 </a:solidFill>
                 <a:latin typeface="Times New Roman"/>
-                <a:ea typeface="Noto Sans CJK SC"/>
+                <a:ea typeface="Noto Serif CJK SC"/>
               </a:rPr>
               <a:t>1. 判断：偶函数的图象关于 y 轴对称（　）</a:t>
             </a:r>
@@ -9117,7 +9272,7 @@
         <p:spPr>
           <a:xfrm>
             <a:off x="548640" y="6345936"/>
-            <a:ext cx="8595360" cy="274320"/>
+            <a:ext cx="7498079" cy="274320"/>
           </a:xfrm>
           <a:prstGeom prst="rect">
             <a:avLst/>
@@ -9142,7 +9297,7 @@
                   <a:srgbClr val="8A94A6"/>
                 </a:solidFill>
                 <a:latin typeface="Times New Roman"/>
-                <a:ea typeface="Noto Sans CJK SC"/>
+                <a:ea typeface="Noto Serif CJK SC"/>
               </a:rPr>
               <a:t>胶州四中 · 第4节 函数的对称性及应用</a:t>
             </a:r>
@@ -9183,7 +9338,7 @@
                   <a:srgbClr val="8A94A6"/>
                 </a:solidFill>
                 <a:latin typeface="Times New Roman"/>
-                <a:ea typeface="Noto Sans CJK SC"/>
+                <a:ea typeface="Noto Serif CJK SC"/>
               </a:rPr>
               <a:t>4</a:t>
             </a:r>
@@ -9217,13 +9372,13 @@
         <p:spPr>
           <a:xfrm>
             <a:off x="0" y="0"/>
-            <a:ext cx="12191695" cy="822960"/>
-          </a:xfrm>
-          <a:prstGeom prst="rect">
-            <a:avLst/>
-          </a:prstGeom>
-          <a:solidFill>
-            <a:srgbClr val="0B1F3A"/>
+            <a:ext cx="12191695" cy="82296"/>
+          </a:xfrm>
+          <a:prstGeom prst="rect">
+            <a:avLst/>
+          </a:prstGeom>
+          <a:solidFill>
+            <a:srgbClr val="1F3864"/>
           </a:solidFill>
           <a:ln>
             <a:noFill/>
@@ -9254,58 +9409,14 @@
       </p:sp>
       <p:sp>
         <p:nvSpPr>
-          <p:cNvPr id="3" name="Rectangle 2"/>
-          <p:cNvSpPr/>
-          <p:nvPr/>
-        </p:nvSpPr>
-        <p:spPr>
-          <a:xfrm>
-            <a:off x="0" y="822960"/>
-            <a:ext cx="12191695" cy="45720"/>
-          </a:xfrm>
-          <a:prstGeom prst="rect">
-            <a:avLst/>
-          </a:prstGeom>
-          <a:solidFill>
-            <a:srgbClr val="2F6FED"/>
-          </a:solidFill>
-          <a:ln>
-            <a:noFill/>
-          </a:ln>
-          <a:effectLst/>
-        </p:spPr>
-        <p:style>
-          <a:lnRef idx="1">
-            <a:schemeClr val="accent1"/>
-          </a:lnRef>
-          <a:fillRef idx="3">
-            <a:schemeClr val="accent1"/>
-          </a:fillRef>
-          <a:effectRef idx="2">
-            <a:schemeClr val="accent1"/>
-          </a:effectRef>
-          <a:fontRef idx="minor">
-            <a:schemeClr val="lt1"/>
-          </a:fontRef>
-        </p:style>
-        <p:txBody>
-          <a:bodyPr rtlCol="0" anchor="ctr"/>
-          <a:lstStyle/>
-          <a:p>
-            <a:pPr algn="ctr"/>
-          </a:p>
-        </p:txBody>
-      </p:sp>
-      <p:sp>
-        <p:nvSpPr>
-          <p:cNvPr id="4" name="TextBox 3"/>
+          <p:cNvPr id="3" name="TextBox 2"/>
           <p:cNvSpPr txBox="1"/>
           <p:nvPr/>
         </p:nvSpPr>
         <p:spPr>
           <a:xfrm>
-            <a:off x="548640" y="137160"/>
-            <a:ext cx="8442656" cy="548640"/>
+            <a:off x="548640" y="292608"/>
+            <a:ext cx="7985455" cy="566928"/>
           </a:xfrm>
           <a:prstGeom prst="rect">
             <a:avLst/>
@@ -9327,10 +9438,10 @@
             <a:r>
               <a:rPr sz="2600" b="1" u="none">
                 <a:solidFill>
-                  <a:srgbClr val="FFFFFF"/>
+                  <a:srgbClr val="1F3864"/>
                 </a:solidFill>
                 <a:latin typeface="Times New Roman"/>
-                <a:ea typeface="Noto Sans CJK SC"/>
+                <a:ea typeface="Noto Serif CJK SC"/>
               </a:rPr>
               <a:t>知识诊断自测</a:t>
             </a:r>
@@ -9339,13 +9450,13 @@
       </p:sp>
       <p:sp>
         <p:nvSpPr>
-          <p:cNvPr id="5" name="Rounded Rectangle 4"/>
+          <p:cNvPr id="4" name="Rounded Rectangle 3"/>
           <p:cNvSpPr/>
           <p:nvPr/>
         </p:nvSpPr>
         <p:spPr>
           <a:xfrm>
-            <a:off x="10966399" y="219456"/>
+            <a:off x="10966399" y="384048"/>
             <a:ext cx="676656" cy="365760"/>
           </a:xfrm>
           <a:prstGeom prst="roundRect">
@@ -9354,7 +9465,7 @@
             </a:avLst>
           </a:prstGeom>
           <a:solidFill>
-            <a:srgbClr val="2E4A78"/>
+            <a:srgbClr val="C00000"/>
           </a:solidFill>
           <a:ln>
             <a:noFill/>
@@ -9385,13 +9496,13 @@
       </p:sp>
       <p:sp>
         <p:nvSpPr>
-          <p:cNvPr id="6" name="TextBox 5"/>
+          <p:cNvPr id="5" name="TextBox 4"/>
           <p:cNvSpPr txBox="1"/>
           <p:nvPr/>
         </p:nvSpPr>
         <p:spPr>
           <a:xfrm>
-            <a:off x="10966399" y="237744"/>
+            <a:off x="10966399" y="402336"/>
             <a:ext cx="676656" cy="329184"/>
           </a:xfrm>
           <a:prstGeom prst="rect">
@@ -9417,10 +9528,54 @@
                   <a:srgbClr val="FFFFFF"/>
                 </a:solidFill>
                 <a:latin typeface="Times New Roman"/>
-                <a:ea typeface="Noto Sans CJK SC"/>
+                <a:ea typeface="Noto Serif CJK SC"/>
               </a:rPr>
               <a:t>练习</a:t>
             </a:r>
+          </a:p>
+        </p:txBody>
+      </p:sp>
+      <p:sp>
+        <p:nvSpPr>
+          <p:cNvPr id="6" name="Rectangle 5"/>
+          <p:cNvSpPr/>
+          <p:nvPr/>
+        </p:nvSpPr>
+        <p:spPr>
+          <a:xfrm>
+            <a:off x="548640" y="950976"/>
+            <a:ext cx="11094415" cy="9525"/>
+          </a:xfrm>
+          <a:prstGeom prst="rect">
+            <a:avLst/>
+          </a:prstGeom>
+          <a:solidFill>
+            <a:srgbClr val="D8DEE8"/>
+          </a:solidFill>
+          <a:ln>
+            <a:noFill/>
+          </a:ln>
+          <a:effectLst/>
+        </p:spPr>
+        <p:style>
+          <a:lnRef idx="1">
+            <a:schemeClr val="accent1"/>
+          </a:lnRef>
+          <a:fillRef idx="3">
+            <a:schemeClr val="accent1"/>
+          </a:fillRef>
+          <a:effectRef idx="2">
+            <a:schemeClr val="accent1"/>
+          </a:effectRef>
+          <a:fontRef idx="minor">
+            <a:schemeClr val="lt1"/>
+          </a:fontRef>
+        </p:style>
+        <p:txBody>
+          <a:bodyPr rtlCol="0" anchor="ctr"/>
+          <a:lstStyle/>
+          <a:p>
+            <a:pPr algn="ctr"/>
           </a:p>
         </p:txBody>
       </p:sp>
@@ -9455,10 +9610,10 @@
             <a:r>
               <a:rPr sz="2200" b="0" u="none">
                 <a:solidFill>
-                  <a:srgbClr val="16202E"/>
+                  <a:srgbClr val="1A2233"/>
                 </a:solidFill>
                 <a:latin typeface="Times New Roman"/>
-                <a:ea typeface="Noto Sans CJK SC"/>
+                <a:ea typeface="Noto Serif CJK SC"/>
               </a:rPr>
               <a:t>2. 判断：若 f(x+1) 为奇函数，则 f(x) 的图象关于点 (1,0) 对称（　）</a:t>
             </a:r>
@@ -9518,7 +9673,7 @@
         <p:spPr>
           <a:xfrm>
             <a:off x="548640" y="6345936"/>
-            <a:ext cx="8595360" cy="274320"/>
+            <a:ext cx="7498079" cy="274320"/>
           </a:xfrm>
           <a:prstGeom prst="rect">
             <a:avLst/>
@@ -9543,7 +9698,7 @@
                   <a:srgbClr val="8A94A6"/>
                 </a:solidFill>
                 <a:latin typeface="Times New Roman"/>
-                <a:ea typeface="Noto Sans CJK SC"/>
+                <a:ea typeface="Noto Serif CJK SC"/>
               </a:rPr>
               <a:t>胶州四中 · 第4节 函数的对称性及应用</a:t>
             </a:r>
@@ -9584,7 +9739,7 @@
                   <a:srgbClr val="8A94A6"/>
                 </a:solidFill>
                 <a:latin typeface="Times New Roman"/>
-                <a:ea typeface="Noto Sans CJK SC"/>
+                <a:ea typeface="Noto Serif CJK SC"/>
               </a:rPr>
               <a:t>5</a:t>
             </a:r>
@@ -9618,13 +9773,13 @@
         <p:spPr>
           <a:xfrm>
             <a:off x="0" y="0"/>
-            <a:ext cx="12191695" cy="822960"/>
-          </a:xfrm>
-          <a:prstGeom prst="rect">
-            <a:avLst/>
-          </a:prstGeom>
-          <a:solidFill>
-            <a:srgbClr val="0B1F3A"/>
+            <a:ext cx="12191695" cy="82296"/>
+          </a:xfrm>
+          <a:prstGeom prst="rect">
+            <a:avLst/>
+          </a:prstGeom>
+          <a:solidFill>
+            <a:srgbClr val="1F3864"/>
           </a:solidFill>
           <a:ln>
             <a:noFill/>
@@ -9655,58 +9810,14 @@
       </p:sp>
       <p:sp>
         <p:nvSpPr>
-          <p:cNvPr id="3" name="Rectangle 2"/>
-          <p:cNvSpPr/>
-          <p:nvPr/>
-        </p:nvSpPr>
-        <p:spPr>
-          <a:xfrm>
-            <a:off x="0" y="822960"/>
-            <a:ext cx="12191695" cy="45720"/>
-          </a:xfrm>
-          <a:prstGeom prst="rect">
-            <a:avLst/>
-          </a:prstGeom>
-          <a:solidFill>
-            <a:srgbClr val="2F6FED"/>
-          </a:solidFill>
-          <a:ln>
-            <a:noFill/>
-          </a:ln>
-          <a:effectLst/>
-        </p:spPr>
-        <p:style>
-          <a:lnRef idx="1">
-            <a:schemeClr val="accent1"/>
-          </a:lnRef>
-          <a:fillRef idx="3">
-            <a:schemeClr val="accent1"/>
-          </a:fillRef>
-          <a:effectRef idx="2">
-            <a:schemeClr val="accent1"/>
-          </a:effectRef>
-          <a:fontRef idx="minor">
-            <a:schemeClr val="lt1"/>
-          </a:fontRef>
-        </p:style>
-        <p:txBody>
-          <a:bodyPr rtlCol="0" anchor="ctr"/>
-          <a:lstStyle/>
-          <a:p>
-            <a:pPr algn="ctr"/>
-          </a:p>
-        </p:txBody>
-      </p:sp>
-      <p:sp>
-        <p:nvSpPr>
-          <p:cNvPr id="4" name="TextBox 3"/>
+          <p:cNvPr id="3" name="TextBox 2"/>
           <p:cNvSpPr txBox="1"/>
           <p:nvPr/>
         </p:nvSpPr>
         <p:spPr>
           <a:xfrm>
-            <a:off x="548640" y="137160"/>
-            <a:ext cx="8442656" cy="548640"/>
+            <a:off x="548640" y="292608"/>
+            <a:ext cx="7985455" cy="566928"/>
           </a:xfrm>
           <a:prstGeom prst="rect">
             <a:avLst/>
@@ -9728,10 +9839,10 @@
             <a:r>
               <a:rPr sz="2600" b="1" u="none">
                 <a:solidFill>
-                  <a:srgbClr val="FFFFFF"/>
+                  <a:srgbClr val="1F3864"/>
                 </a:solidFill>
                 <a:latin typeface="Times New Roman"/>
-                <a:ea typeface="Noto Sans CJK SC"/>
+                <a:ea typeface="Noto Serif CJK SC"/>
               </a:rPr>
               <a:t>知识诊断自测</a:t>
             </a:r>
@@ -9740,13 +9851,13 @@
       </p:sp>
       <p:sp>
         <p:nvSpPr>
-          <p:cNvPr id="5" name="Rounded Rectangle 4"/>
+          <p:cNvPr id="4" name="Rounded Rectangle 3"/>
           <p:cNvSpPr/>
           <p:nvPr/>
         </p:nvSpPr>
         <p:spPr>
           <a:xfrm>
-            <a:off x="10966399" y="219456"/>
+            <a:off x="10966399" y="384048"/>
             <a:ext cx="676656" cy="365760"/>
           </a:xfrm>
           <a:prstGeom prst="roundRect">
@@ -9755,7 +9866,7 @@
             </a:avLst>
           </a:prstGeom>
           <a:solidFill>
-            <a:srgbClr val="2E4A78"/>
+            <a:srgbClr val="C00000"/>
           </a:solidFill>
           <a:ln>
             <a:noFill/>
@@ -9786,13 +9897,13 @@
       </p:sp>
       <p:sp>
         <p:nvSpPr>
-          <p:cNvPr id="6" name="TextBox 5"/>
+          <p:cNvPr id="5" name="TextBox 4"/>
           <p:cNvSpPr txBox="1"/>
           <p:nvPr/>
         </p:nvSpPr>
         <p:spPr>
           <a:xfrm>
-            <a:off x="10966399" y="237744"/>
+            <a:off x="10966399" y="402336"/>
             <a:ext cx="676656" cy="329184"/>
           </a:xfrm>
           <a:prstGeom prst="rect">
@@ -9818,10 +9929,54 @@
                   <a:srgbClr val="FFFFFF"/>
                 </a:solidFill>
                 <a:latin typeface="Times New Roman"/>
-                <a:ea typeface="Noto Sans CJK SC"/>
+                <a:ea typeface="Noto Serif CJK SC"/>
               </a:rPr>
               <a:t>练习</a:t>
             </a:r>
+          </a:p>
+        </p:txBody>
+      </p:sp>
+      <p:sp>
+        <p:nvSpPr>
+          <p:cNvPr id="6" name="Rectangle 5"/>
+          <p:cNvSpPr/>
+          <p:nvPr/>
+        </p:nvSpPr>
+        <p:spPr>
+          <a:xfrm>
+            <a:off x="548640" y="950976"/>
+            <a:ext cx="11094415" cy="9525"/>
+          </a:xfrm>
+          <a:prstGeom prst="rect">
+            <a:avLst/>
+          </a:prstGeom>
+          <a:solidFill>
+            <a:srgbClr val="D8DEE8"/>
+          </a:solidFill>
+          <a:ln>
+            <a:noFill/>
+          </a:ln>
+          <a:effectLst/>
+        </p:spPr>
+        <p:style>
+          <a:lnRef idx="1">
+            <a:schemeClr val="accent1"/>
+          </a:lnRef>
+          <a:fillRef idx="3">
+            <a:schemeClr val="accent1"/>
+          </a:fillRef>
+          <a:effectRef idx="2">
+            <a:schemeClr val="accent1"/>
+          </a:effectRef>
+          <a:fontRef idx="minor">
+            <a:schemeClr val="lt1"/>
+          </a:fontRef>
+        </p:style>
+        <p:txBody>
+          <a:bodyPr rtlCol="0" anchor="ctr"/>
+          <a:lstStyle/>
+          <a:p>
+            <a:pPr algn="ctr"/>
           </a:p>
         </p:txBody>
       </p:sp>
@@ -9856,10 +10011,10 @@
             <a:r>
               <a:rPr sz="2200" b="0" u="none">
                 <a:solidFill>
-                  <a:srgbClr val="16202E"/>
+                  <a:srgbClr val="1A2233"/>
                 </a:solidFill>
                 <a:latin typeface="Times New Roman"/>
-                <a:ea typeface="Noto Sans CJK SC"/>
+                <a:ea typeface="Noto Serif CJK SC"/>
               </a:rPr>
               <a:t>3. 若 f(x) 满足 f(2-x)=f(x)，则 f(x) 的图象关于直线 ____ 对称。</a:t>
             </a:r>
@@ -9919,7 +10074,7 @@
         <p:spPr>
           <a:xfrm>
             <a:off x="548640" y="6345936"/>
-            <a:ext cx="8595360" cy="274320"/>
+            <a:ext cx="7498079" cy="274320"/>
           </a:xfrm>
           <a:prstGeom prst="rect">
             <a:avLst/>
@@ -9944,7 +10099,7 @@
                   <a:srgbClr val="8A94A6"/>
                 </a:solidFill>
                 <a:latin typeface="Times New Roman"/>
-                <a:ea typeface="Noto Sans CJK SC"/>
+                <a:ea typeface="Noto Serif CJK SC"/>
               </a:rPr>
               <a:t>胶州四中 · 第4节 函数的对称性及应用</a:t>
             </a:r>
@@ -9985,7 +10140,7 @@
                   <a:srgbClr val="8A94A6"/>
                 </a:solidFill>
                 <a:latin typeface="Times New Roman"/>
-                <a:ea typeface="Noto Sans CJK SC"/>
+                <a:ea typeface="Noto Serif CJK SC"/>
               </a:rPr>
               <a:t>6</a:t>
             </a:r>
@@ -10025,7 +10180,7 @@
             <a:avLst/>
           </a:prstGeom>
           <a:solidFill>
-            <a:srgbClr val="E4EBF7"/>
+            <a:srgbClr val="EAF0FA"/>
           </a:solidFill>
           <a:ln>
             <a:noFill/>
@@ -10069,7 +10224,7 @@
             <a:avLst/>
           </a:prstGeom>
           <a:solidFill>
-            <a:srgbClr val="E4EBF7"/>
+            <a:srgbClr val="EAF0FA"/>
           </a:solidFill>
           <a:ln>
             <a:noFill/>
@@ -10113,7 +10268,7 @@
             <a:avLst/>
           </a:prstGeom>
           <a:solidFill>
-            <a:srgbClr val="E4EBF7"/>
+            <a:srgbClr val="EAF0FA"/>
           </a:solidFill>
           <a:ln>
             <a:noFill/>
@@ -10157,7 +10312,7 @@
             <a:avLst/>
           </a:prstGeom>
           <a:solidFill>
-            <a:srgbClr val="E4EBF7"/>
+            <a:srgbClr val="EAF0FA"/>
           </a:solidFill>
           <a:ln>
             <a:noFill/>
@@ -10201,7 +10356,7 @@
             <a:avLst/>
           </a:prstGeom>
           <a:solidFill>
-            <a:srgbClr val="E4EBF7"/>
+            <a:srgbClr val="EAF0FA"/>
           </a:solidFill>
           <a:ln>
             <a:noFill/>
@@ -10245,7 +10400,7 @@
             <a:avLst/>
           </a:prstGeom>
           <a:solidFill>
-            <a:srgbClr val="E4EBF7"/>
+            <a:srgbClr val="EAF0FA"/>
           </a:solidFill>
           <a:ln>
             <a:noFill/>
@@ -10289,7 +10444,7 @@
             <a:avLst/>
           </a:prstGeom>
           <a:solidFill>
-            <a:srgbClr val="E4EBF7"/>
+            <a:srgbClr val="EAF0FA"/>
           </a:solidFill>
           <a:ln>
             <a:noFill/>
@@ -10333,7 +10488,7 @@
             <a:avLst/>
           </a:prstGeom>
           <a:solidFill>
-            <a:srgbClr val="E4EBF7"/>
+            <a:srgbClr val="EAF0FA"/>
           </a:solidFill>
           <a:ln>
             <a:noFill/>
@@ -10377,7 +10532,7 @@
             <a:avLst/>
           </a:prstGeom>
           <a:solidFill>
-            <a:srgbClr val="E4EBF7"/>
+            <a:srgbClr val="EAF0FA"/>
           </a:solidFill>
           <a:ln>
             <a:noFill/>
@@ -10408,23 +10563,27 @@
       </p:sp>
       <p:sp>
         <p:nvSpPr>
-          <p:cNvPr id="11" name="Rectangle 10"/>
+          <p:cNvPr id="11" name="Rounded Rectangle 10"/>
           <p:cNvSpPr/>
           <p:nvPr/>
         </p:nvSpPr>
         <p:spPr>
           <a:xfrm>
-            <a:off x="0" y="0"/>
-            <a:ext cx="12191695" cy="82296"/>
-          </a:xfrm>
-          <a:prstGeom prst="rect">
-            <a:avLst/>
-          </a:prstGeom>
-          <a:solidFill>
-            <a:srgbClr val="0B1F3A"/>
-          </a:solidFill>
-          <a:ln>
-            <a:noFill/>
+            <a:off x="502920" y="384048"/>
+            <a:ext cx="11185855" cy="749808"/>
+          </a:xfrm>
+          <a:prstGeom prst="roundRect">
+            <a:avLst>
+              <a:gd name="adj" fmla="val 16000"/>
+            </a:avLst>
+          </a:prstGeom>
+          <a:solidFill>
+            <a:srgbClr val="FFFFFF"/>
+          </a:solidFill>
+          <a:ln w="15875">
+            <a:solidFill>
+              <a:srgbClr val="2F6FED"/>
+            </a:solidFill>
           </a:ln>
           <a:effectLst/>
         </p:spPr>
@@ -10452,102 +10611,14 @@
       </p:sp>
       <p:sp>
         <p:nvSpPr>
-          <p:cNvPr id="12" name="Rectangle 11"/>
-          <p:cNvSpPr/>
-          <p:nvPr/>
-        </p:nvSpPr>
-        <p:spPr>
-          <a:xfrm>
-            <a:off x="548640" y="457200"/>
-            <a:ext cx="128016" cy="128016"/>
-          </a:xfrm>
-          <a:prstGeom prst="rect">
-            <a:avLst/>
-          </a:prstGeom>
-          <a:solidFill>
-            <a:srgbClr val="2F6FED"/>
-          </a:solidFill>
-          <a:ln>
-            <a:noFill/>
-          </a:ln>
-          <a:effectLst/>
-        </p:spPr>
-        <p:style>
-          <a:lnRef idx="1">
-            <a:schemeClr val="accent1"/>
-          </a:lnRef>
-          <a:fillRef idx="3">
-            <a:schemeClr val="accent1"/>
-          </a:fillRef>
-          <a:effectRef idx="2">
-            <a:schemeClr val="accent1"/>
-          </a:effectRef>
-          <a:fontRef idx="minor">
-            <a:schemeClr val="lt1"/>
-          </a:fontRef>
-        </p:style>
-        <p:txBody>
-          <a:bodyPr rtlCol="0" anchor="ctr"/>
-          <a:lstStyle/>
-          <a:p>
-            <a:pPr algn="ctr"/>
-          </a:p>
-        </p:txBody>
-      </p:sp>
-      <p:sp>
-        <p:nvSpPr>
-          <p:cNvPr id="13" name="Rectangle 12"/>
-          <p:cNvSpPr/>
-          <p:nvPr/>
-        </p:nvSpPr>
-        <p:spPr>
-          <a:xfrm>
-            <a:off x="548640" y="658368"/>
-            <a:ext cx="128016" cy="128016"/>
-          </a:xfrm>
-          <a:prstGeom prst="rect">
-            <a:avLst/>
-          </a:prstGeom>
-          <a:solidFill>
-            <a:srgbClr val="2F6FED"/>
-          </a:solidFill>
-          <a:ln>
-            <a:noFill/>
-          </a:ln>
-          <a:effectLst/>
-        </p:spPr>
-        <p:style>
-          <a:lnRef idx="1">
-            <a:schemeClr val="accent1"/>
-          </a:lnRef>
-          <a:fillRef idx="3">
-            <a:schemeClr val="accent1"/>
-          </a:fillRef>
-          <a:effectRef idx="2">
-            <a:schemeClr val="accent1"/>
-          </a:effectRef>
-          <a:fontRef idx="minor">
-            <a:schemeClr val="lt1"/>
-          </a:fontRef>
-        </p:style>
-        <p:txBody>
-          <a:bodyPr rtlCol="0" anchor="ctr"/>
-          <a:lstStyle/>
-          <a:p>
-            <a:pPr algn="ctr"/>
-          </a:p>
-        </p:txBody>
-      </p:sp>
-      <p:sp>
-        <p:nvSpPr>
-          <p:cNvPr id="14" name="TextBox 13"/>
+          <p:cNvPr id="12" name="TextBox 11"/>
           <p:cNvSpPr txBox="1"/>
           <p:nvPr/>
         </p:nvSpPr>
         <p:spPr>
           <a:xfrm>
-            <a:off x="841248" y="402336"/>
-            <a:ext cx="9448495" cy="621792"/>
+            <a:off x="868680" y="457200"/>
+            <a:ext cx="8351215" cy="603504"/>
           </a:xfrm>
           <a:prstGeom prst="rect">
             <a:avLst/>
@@ -10569,10 +10640,10 @@
             <a:r>
               <a:rPr sz="2800" b="1" u="none">
                 <a:solidFill>
-                  <a:srgbClr val="0B1F3A"/>
+                  <a:srgbClr val="1F3864"/>
                 </a:solidFill>
                 <a:latin typeface="Times New Roman"/>
-                <a:ea typeface="Noto Sans CJK SC"/>
+                <a:ea typeface="Noto Serif CJK SC"/>
               </a:rPr>
               <a:t>常用结论与微点提醒｜公式</a:t>
             </a:r>
@@ -10581,7 +10652,7 @@
       </p:sp>
       <p:sp>
         <p:nvSpPr>
-          <p:cNvPr id="15" name="Rounded Rectangle 14"/>
+          <p:cNvPr id="13" name="Rounded Rectangle 12"/>
           <p:cNvSpPr/>
           <p:nvPr/>
         </p:nvSpPr>
@@ -10596,7 +10667,7 @@
             </a:avLst>
           </a:prstGeom>
           <a:solidFill>
-            <a:srgbClr val="EAF0FB"/>
+            <a:srgbClr val="EEF3FB"/>
           </a:solidFill>
           <a:ln>
             <a:noFill/>
@@ -10627,7 +10698,7 @@
       </p:sp>
       <p:sp>
         <p:nvSpPr>
-          <p:cNvPr id="16" name="TextBox 15"/>
+          <p:cNvPr id="14" name="TextBox 13"/>
           <p:cNvSpPr txBox="1"/>
           <p:nvPr/>
         </p:nvSpPr>
@@ -10656,10 +10727,10 @@
             <a:r>
               <a:rPr sz="3200" b="1" u="none">
                 <a:solidFill>
-                  <a:srgbClr val="0B1F3A"/>
+                  <a:srgbClr val="1F3864"/>
                 </a:solidFill>
                 <a:latin typeface="Times New Roman"/>
-                <a:ea typeface="Noto Sans CJK SC"/>
+                <a:ea typeface="Noto Serif CJK SC"/>
               </a:rPr>
               <a:t>f(a+x)=f(a-x) ⇔ 图象关于 x=a 对称</a:t>
             </a:r>
@@ -10668,7 +10739,7 @@
       </p:sp>
       <p:sp>
         <p:nvSpPr>
-          <p:cNvPr id="17" name="Rounded Rectangle 16"/>
+          <p:cNvPr id="15" name="Rounded Rectangle 14"/>
           <p:cNvSpPr/>
           <p:nvPr/>
         </p:nvSpPr>
@@ -10716,7 +10787,7 @@
       </p:sp>
       <p:sp>
         <p:nvSpPr>
-          <p:cNvPr id="18" name="TextBox 17"/>
+          <p:cNvPr id="16" name="TextBox 15"/>
           <p:cNvSpPr txBox="1"/>
           <p:nvPr/>
         </p:nvSpPr>
@@ -10748,7 +10819,7 @@
                   <a:srgbClr val="2F6FED"/>
                 </a:solidFill>
                 <a:latin typeface="Times New Roman"/>
-                <a:ea typeface="Noto Sans CJK SC"/>
+                <a:ea typeface="Noto Serif CJK SC"/>
               </a:rPr>
               <a:t>条件</a:t>
             </a:r>
@@ -10757,7 +10828,7 @@
       </p:sp>
       <p:sp>
         <p:nvSpPr>
-          <p:cNvPr id="19" name="TextBox 18"/>
+          <p:cNvPr id="17" name="TextBox 16"/>
           <p:cNvSpPr txBox="1"/>
           <p:nvPr/>
         </p:nvSpPr>
@@ -10786,10 +10857,10 @@
             <a:r>
               <a:rPr sz="1600" b="0" u="none">
                 <a:solidFill>
-                  <a:srgbClr val="16202E"/>
+                  <a:srgbClr val="1A2233"/>
                 </a:solidFill>
                 <a:latin typeface="Times New Roman"/>
-                <a:ea typeface="Noto Sans CJK SC"/>
+                <a:ea typeface="Noto Serif CJK SC"/>
               </a:rPr>
               <a:t>a 为常数</a:t>
             </a:r>
@@ -10798,7 +10869,7 @@
       </p:sp>
       <p:sp>
         <p:nvSpPr>
-          <p:cNvPr id="20" name="Rounded Rectangle 19"/>
+          <p:cNvPr id="18" name="Rounded Rectangle 17"/>
           <p:cNvSpPr/>
           <p:nvPr/>
         </p:nvSpPr>
@@ -10846,7 +10917,7 @@
       </p:sp>
       <p:sp>
         <p:nvSpPr>
-          <p:cNvPr id="21" name="TextBox 20"/>
+          <p:cNvPr id="19" name="TextBox 18"/>
           <p:cNvSpPr txBox="1"/>
           <p:nvPr/>
         </p:nvSpPr>
@@ -10878,7 +10949,7 @@
                   <a:srgbClr val="2F6FED"/>
                 </a:solidFill>
                 <a:latin typeface="Times New Roman"/>
-                <a:ea typeface="Noto Sans CJK SC"/>
+                <a:ea typeface="Noto Serif CJK SC"/>
               </a:rPr>
               <a:t>结论</a:t>
             </a:r>
@@ -10887,7 +10958,7 @@
       </p:sp>
       <p:sp>
         <p:nvSpPr>
-          <p:cNvPr id="22" name="TextBox 21"/>
+          <p:cNvPr id="20" name="TextBox 19"/>
           <p:cNvSpPr txBox="1"/>
           <p:nvPr/>
         </p:nvSpPr>
@@ -10916,10 +10987,10 @@
             <a:r>
               <a:rPr sz="1600" b="0" u="none">
                 <a:solidFill>
-                  <a:srgbClr val="16202E"/>
+                  <a:srgbClr val="1A2233"/>
                 </a:solidFill>
                 <a:latin typeface="Times New Roman"/>
-                <a:ea typeface="Noto Sans CJK SC"/>
+                <a:ea typeface="Noto Serif CJK SC"/>
               </a:rPr>
               <a:t>对称轴 x=a</a:t>
             </a:r>
@@ -10928,7 +10999,7 @@
       </p:sp>
       <p:sp>
         <p:nvSpPr>
-          <p:cNvPr id="23" name="Rectangle 22"/>
+          <p:cNvPr id="21" name="Rectangle 20"/>
           <p:cNvSpPr/>
           <p:nvPr/>
         </p:nvSpPr>
@@ -10972,14 +11043,14 @@
       </p:sp>
       <p:sp>
         <p:nvSpPr>
-          <p:cNvPr id="24" name="TextBox 23"/>
+          <p:cNvPr id="22" name="TextBox 21"/>
           <p:cNvSpPr txBox="1"/>
           <p:nvPr/>
         </p:nvSpPr>
         <p:spPr>
           <a:xfrm>
             <a:off x="548640" y="6345936"/>
-            <a:ext cx="8595360" cy="274320"/>
+            <a:ext cx="7498079" cy="274320"/>
           </a:xfrm>
           <a:prstGeom prst="rect">
             <a:avLst/>
@@ -11004,7 +11075,7 @@
                   <a:srgbClr val="8A94A6"/>
                 </a:solidFill>
                 <a:latin typeface="Times New Roman"/>
-                <a:ea typeface="Noto Sans CJK SC"/>
+                <a:ea typeface="Noto Serif CJK SC"/>
               </a:rPr>
               <a:t>胶州四中 · 第4节 函数的对称性及应用</a:t>
             </a:r>
@@ -11013,7 +11084,7 @@
       </p:sp>
       <p:sp>
         <p:nvSpPr>
-          <p:cNvPr id="25" name="TextBox 24"/>
+          <p:cNvPr id="23" name="TextBox 22"/>
           <p:cNvSpPr txBox="1"/>
           <p:nvPr/>
         </p:nvSpPr>
@@ -11045,7 +11116,7 @@
                   <a:srgbClr val="8A94A6"/>
                 </a:solidFill>
                 <a:latin typeface="Times New Roman"/>
-                <a:ea typeface="Noto Sans CJK SC"/>
+                <a:ea typeface="Noto Serif CJK SC"/>
               </a:rPr>
               <a:t>7</a:t>
             </a:r>
@@ -11085,7 +11156,7 @@
             <a:avLst/>
           </a:prstGeom>
           <a:solidFill>
-            <a:srgbClr val="E4EBF7"/>
+            <a:srgbClr val="EAF0FA"/>
           </a:solidFill>
           <a:ln>
             <a:noFill/>
@@ -11129,7 +11200,7 @@
             <a:avLst/>
           </a:prstGeom>
           <a:solidFill>
-            <a:srgbClr val="E4EBF7"/>
+            <a:srgbClr val="EAF0FA"/>
           </a:solidFill>
           <a:ln>
             <a:noFill/>
@@ -11173,7 +11244,7 @@
             <a:avLst/>
           </a:prstGeom>
           <a:solidFill>
-            <a:srgbClr val="E4EBF7"/>
+            <a:srgbClr val="EAF0FA"/>
           </a:solidFill>
           <a:ln>
             <a:noFill/>
@@ -11217,7 +11288,7 @@
             <a:avLst/>
           </a:prstGeom>
           <a:solidFill>
-            <a:srgbClr val="E4EBF7"/>
+            <a:srgbClr val="EAF0FA"/>
           </a:solidFill>
           <a:ln>
             <a:noFill/>
@@ -11261,7 +11332,7 @@
             <a:avLst/>
           </a:prstGeom>
           <a:solidFill>
-            <a:srgbClr val="E4EBF7"/>
+            <a:srgbClr val="EAF0FA"/>
           </a:solidFill>
           <a:ln>
             <a:noFill/>
@@ -11305,7 +11376,7 @@
             <a:avLst/>
           </a:prstGeom>
           <a:solidFill>
-            <a:srgbClr val="E4EBF7"/>
+            <a:srgbClr val="EAF0FA"/>
           </a:solidFill>
           <a:ln>
             <a:noFill/>
@@ -11349,7 +11420,7 @@
             <a:avLst/>
           </a:prstGeom>
           <a:solidFill>
-            <a:srgbClr val="E4EBF7"/>
+            <a:srgbClr val="EAF0FA"/>
           </a:solidFill>
           <a:ln>
             <a:noFill/>
@@ -11393,7 +11464,7 @@
             <a:avLst/>
           </a:prstGeom>
           <a:solidFill>
-            <a:srgbClr val="E4EBF7"/>
+            <a:srgbClr val="EAF0FA"/>
           </a:solidFill>
           <a:ln>
             <a:noFill/>
@@ -11437,7 +11508,7 @@
             <a:avLst/>
           </a:prstGeom>
           <a:solidFill>
-            <a:srgbClr val="E4EBF7"/>
+            <a:srgbClr val="EAF0FA"/>
           </a:solidFill>
           <a:ln>
             <a:noFill/>
@@ -11468,23 +11539,27 @@
       </p:sp>
       <p:sp>
         <p:nvSpPr>
-          <p:cNvPr id="11" name="Rectangle 10"/>
+          <p:cNvPr id="11" name="Rounded Rectangle 10"/>
           <p:cNvSpPr/>
           <p:nvPr/>
         </p:nvSpPr>
         <p:spPr>
           <a:xfrm>
-            <a:off x="0" y="0"/>
-            <a:ext cx="12191695" cy="82296"/>
-          </a:xfrm>
-          <a:prstGeom prst="rect">
-            <a:avLst/>
-          </a:prstGeom>
-          <a:solidFill>
-            <a:srgbClr val="0B1F3A"/>
-          </a:solidFill>
-          <a:ln>
-            <a:noFill/>
+            <a:off x="502920" y="384048"/>
+            <a:ext cx="11185855" cy="749808"/>
+          </a:xfrm>
+          <a:prstGeom prst="roundRect">
+            <a:avLst>
+              <a:gd name="adj" fmla="val 16000"/>
+            </a:avLst>
+          </a:prstGeom>
+          <a:solidFill>
+            <a:srgbClr val="FFFFFF"/>
+          </a:solidFill>
+          <a:ln w="15875">
+            <a:solidFill>
+              <a:srgbClr val="2F6FED"/>
+            </a:solidFill>
           </a:ln>
           <a:effectLst/>
         </p:spPr>
@@ -11512,102 +11587,14 @@
       </p:sp>
       <p:sp>
         <p:nvSpPr>
-          <p:cNvPr id="12" name="Rectangle 11"/>
-          <p:cNvSpPr/>
-          <p:nvPr/>
-        </p:nvSpPr>
-        <p:spPr>
-          <a:xfrm>
-            <a:off x="548640" y="457200"/>
-            <a:ext cx="128016" cy="128016"/>
-          </a:xfrm>
-          <a:prstGeom prst="rect">
-            <a:avLst/>
-          </a:prstGeom>
-          <a:solidFill>
-            <a:srgbClr val="2F6FED"/>
-          </a:solidFill>
-          <a:ln>
-            <a:noFill/>
-          </a:ln>
-          <a:effectLst/>
-        </p:spPr>
-        <p:style>
-          <a:lnRef idx="1">
-            <a:schemeClr val="accent1"/>
-          </a:lnRef>
-          <a:fillRef idx="3">
-            <a:schemeClr val="accent1"/>
-          </a:fillRef>
-          <a:effectRef idx="2">
-            <a:schemeClr val="accent1"/>
-          </a:effectRef>
-          <a:fontRef idx="minor">
-            <a:schemeClr val="lt1"/>
-          </a:fontRef>
-        </p:style>
-        <p:txBody>
-          <a:bodyPr rtlCol="0" anchor="ctr"/>
-          <a:lstStyle/>
-          <a:p>
-            <a:pPr algn="ctr"/>
-          </a:p>
-        </p:txBody>
-      </p:sp>
-      <p:sp>
-        <p:nvSpPr>
-          <p:cNvPr id="13" name="Rectangle 12"/>
-          <p:cNvSpPr/>
-          <p:nvPr/>
-        </p:nvSpPr>
-        <p:spPr>
-          <a:xfrm>
-            <a:off x="548640" y="658368"/>
-            <a:ext cx="128016" cy="128016"/>
-          </a:xfrm>
-          <a:prstGeom prst="rect">
-            <a:avLst/>
-          </a:prstGeom>
-          <a:solidFill>
-            <a:srgbClr val="2F6FED"/>
-          </a:solidFill>
-          <a:ln>
-            <a:noFill/>
-          </a:ln>
-          <a:effectLst/>
-        </p:spPr>
-        <p:style>
-          <a:lnRef idx="1">
-            <a:schemeClr val="accent1"/>
-          </a:lnRef>
-          <a:fillRef idx="3">
-            <a:schemeClr val="accent1"/>
-          </a:fillRef>
-          <a:effectRef idx="2">
-            <a:schemeClr val="accent1"/>
-          </a:effectRef>
-          <a:fontRef idx="minor">
-            <a:schemeClr val="lt1"/>
-          </a:fontRef>
-        </p:style>
-        <p:txBody>
-          <a:bodyPr rtlCol="0" anchor="ctr"/>
-          <a:lstStyle/>
-          <a:p>
-            <a:pPr algn="ctr"/>
-          </a:p>
-        </p:txBody>
-      </p:sp>
-      <p:sp>
-        <p:nvSpPr>
-          <p:cNvPr id="14" name="TextBox 13"/>
+          <p:cNvPr id="12" name="TextBox 11"/>
           <p:cNvSpPr txBox="1"/>
           <p:nvPr/>
         </p:nvSpPr>
         <p:spPr>
           <a:xfrm>
-            <a:off x="841248" y="402336"/>
-            <a:ext cx="9448495" cy="621792"/>
+            <a:off x="868680" y="457200"/>
+            <a:ext cx="8351215" cy="603504"/>
           </a:xfrm>
           <a:prstGeom prst="rect">
             <a:avLst/>
@@ -11629,10 +11616,10 @@
             <a:r>
               <a:rPr sz="2800" b="1" u="none">
                 <a:solidFill>
-                  <a:srgbClr val="0B1F3A"/>
+                  <a:srgbClr val="1F3864"/>
                 </a:solidFill>
                 <a:latin typeface="Times New Roman"/>
-                <a:ea typeface="Noto Sans CJK SC"/>
+                <a:ea typeface="Noto Serif CJK SC"/>
               </a:rPr>
               <a:t>常用结论与微点提醒｜公式</a:t>
             </a:r>
@@ -11641,7 +11628,7 @@
       </p:sp>
       <p:sp>
         <p:nvSpPr>
-          <p:cNvPr id="15" name="Rounded Rectangle 14"/>
+          <p:cNvPr id="13" name="Rounded Rectangle 12"/>
           <p:cNvSpPr/>
           <p:nvPr/>
         </p:nvSpPr>
@@ -11656,7 +11643,7 @@
             </a:avLst>
           </a:prstGeom>
           <a:solidFill>
-            <a:srgbClr val="EAF0FB"/>
+            <a:srgbClr val="EEF3FB"/>
           </a:solidFill>
           <a:ln>
             <a:noFill/>
@@ -11687,7 +11674,7 @@
       </p:sp>
       <p:sp>
         <p:nvSpPr>
-          <p:cNvPr id="16" name="TextBox 15"/>
+          <p:cNvPr id="14" name="TextBox 13"/>
           <p:cNvSpPr txBox="1"/>
           <p:nvPr/>
         </p:nvSpPr>
@@ -11716,10 +11703,10 @@
             <a:r>
               <a:rPr sz="3200" b="1" u="none">
                 <a:solidFill>
-                  <a:srgbClr val="0B1F3A"/>
+                  <a:srgbClr val="1F3864"/>
                 </a:solidFill>
                 <a:latin typeface="Times New Roman"/>
-                <a:ea typeface="Noto Sans CJK SC"/>
+                <a:ea typeface="Noto Serif CJK SC"/>
               </a:rPr>
               <a:t>f(a+x)+f(a-x)=2b ⇔ 图象关于点 (a,b) 对称</a:t>
             </a:r>
@@ -11728,7 +11715,7 @@
       </p:sp>
       <p:sp>
         <p:nvSpPr>
-          <p:cNvPr id="17" name="Rounded Rectangle 16"/>
+          <p:cNvPr id="15" name="Rounded Rectangle 14"/>
           <p:cNvSpPr/>
           <p:nvPr/>
         </p:nvSpPr>
@@ -11776,7 +11763,7 @@
       </p:sp>
       <p:sp>
         <p:nvSpPr>
-          <p:cNvPr id="18" name="TextBox 17"/>
+          <p:cNvPr id="16" name="TextBox 15"/>
           <p:cNvSpPr txBox="1"/>
           <p:nvPr/>
         </p:nvSpPr>
@@ -11808,7 +11795,7 @@
                   <a:srgbClr val="2F6FED"/>
                 </a:solidFill>
                 <a:latin typeface="Times New Roman"/>
-                <a:ea typeface="Noto Sans CJK SC"/>
+                <a:ea typeface="Noto Serif CJK SC"/>
               </a:rPr>
               <a:t>条件</a:t>
             </a:r>
@@ -11817,7 +11804,7 @@
       </p:sp>
       <p:sp>
         <p:nvSpPr>
-          <p:cNvPr id="19" name="TextBox 18"/>
+          <p:cNvPr id="17" name="TextBox 16"/>
           <p:cNvSpPr txBox="1"/>
           <p:nvPr/>
         </p:nvSpPr>
@@ -11846,10 +11833,10 @@
             <a:r>
               <a:rPr sz="1600" b="0" u="none">
                 <a:solidFill>
-                  <a:srgbClr val="16202E"/>
+                  <a:srgbClr val="1A2233"/>
                 </a:solidFill>
                 <a:latin typeface="Times New Roman"/>
-                <a:ea typeface="Noto Sans CJK SC"/>
+                <a:ea typeface="Noto Serif CJK SC"/>
               </a:rPr>
               <a:t>函数在 R 上有定义</a:t>
             </a:r>
@@ -11858,7 +11845,7 @@
       </p:sp>
       <p:sp>
         <p:nvSpPr>
-          <p:cNvPr id="20" name="Rounded Rectangle 19"/>
+          <p:cNvPr id="18" name="Rounded Rectangle 17"/>
           <p:cNvSpPr/>
           <p:nvPr/>
         </p:nvSpPr>
@@ -11906,7 +11893,7 @@
       </p:sp>
       <p:sp>
         <p:nvSpPr>
-          <p:cNvPr id="21" name="TextBox 20"/>
+          <p:cNvPr id="19" name="TextBox 18"/>
           <p:cNvSpPr txBox="1"/>
           <p:nvPr/>
         </p:nvSpPr>
@@ -11938,7 +11925,7 @@
                   <a:srgbClr val="2F6FED"/>
                 </a:solidFill>
                 <a:latin typeface="Times New Roman"/>
-                <a:ea typeface="Noto Sans CJK SC"/>
+                <a:ea typeface="Noto Serif CJK SC"/>
               </a:rPr>
               <a:t>结论</a:t>
             </a:r>
@@ -11947,7 +11934,7 @@
       </p:sp>
       <p:sp>
         <p:nvSpPr>
-          <p:cNvPr id="22" name="TextBox 21"/>
+          <p:cNvPr id="20" name="TextBox 19"/>
           <p:cNvSpPr txBox="1"/>
           <p:nvPr/>
         </p:nvSpPr>
@@ -11976,10 +11963,10 @@
             <a:r>
               <a:rPr sz="1600" b="0" u="none">
                 <a:solidFill>
-                  <a:srgbClr val="16202E"/>
+                  <a:srgbClr val="1A2233"/>
                 </a:solidFill>
                 <a:latin typeface="Times New Roman"/>
-                <a:ea typeface="Noto Sans CJK SC"/>
+                <a:ea typeface="Noto Serif CJK SC"/>
               </a:rPr>
               <a:t>对称中心 (a,b)</a:t>
             </a:r>
@@ -11988,7 +11975,7 @@
       </p:sp>
       <p:sp>
         <p:nvSpPr>
-          <p:cNvPr id="23" name="Rectangle 22"/>
+          <p:cNvPr id="21" name="Rectangle 20"/>
           <p:cNvSpPr/>
           <p:nvPr/>
         </p:nvSpPr>
@@ -12032,14 +12019,14 @@
       </p:sp>
       <p:sp>
         <p:nvSpPr>
-          <p:cNvPr id="24" name="TextBox 23"/>
+          <p:cNvPr id="22" name="TextBox 21"/>
           <p:cNvSpPr txBox="1"/>
           <p:nvPr/>
         </p:nvSpPr>
         <p:spPr>
           <a:xfrm>
             <a:off x="548640" y="6345936"/>
-            <a:ext cx="8595360" cy="274320"/>
+            <a:ext cx="7498079" cy="274320"/>
           </a:xfrm>
           <a:prstGeom prst="rect">
             <a:avLst/>
@@ -12064,7 +12051,7 @@
                   <a:srgbClr val="8A94A6"/>
                 </a:solidFill>
                 <a:latin typeface="Times New Roman"/>
-                <a:ea typeface="Noto Sans CJK SC"/>
+                <a:ea typeface="Noto Serif CJK SC"/>
               </a:rPr>
               <a:t>胶州四中 · 第4节 函数的对称性及应用</a:t>
             </a:r>
@@ -12073,7 +12060,7 @@
       </p:sp>
       <p:sp>
         <p:nvSpPr>
-          <p:cNvPr id="25" name="TextBox 24"/>
+          <p:cNvPr id="23" name="TextBox 22"/>
           <p:cNvSpPr txBox="1"/>
           <p:nvPr/>
         </p:nvSpPr>
@@ -12105,7 +12092,7 @@
                   <a:srgbClr val="8A94A6"/>
                 </a:solidFill>
                 <a:latin typeface="Times New Roman"/>
-                <a:ea typeface="Noto Sans CJK SC"/>
+                <a:ea typeface="Noto Serif CJK SC"/>
               </a:rPr>
               <a:t>8</a:t>
             </a:r>
@@ -12139,13 +12126,13 @@
         <p:spPr>
           <a:xfrm>
             <a:off x="0" y="0"/>
-            <a:ext cx="12191695" cy="822960"/>
-          </a:xfrm>
-          <a:prstGeom prst="rect">
-            <a:avLst/>
-          </a:prstGeom>
-          <a:solidFill>
-            <a:srgbClr val="0B1F3A"/>
+            <a:ext cx="12191695" cy="82296"/>
+          </a:xfrm>
+          <a:prstGeom prst="rect">
+            <a:avLst/>
+          </a:prstGeom>
+          <a:solidFill>
+            <a:srgbClr val="1F3864"/>
           </a:solidFill>
           <a:ln>
             <a:noFill/>
@@ -12176,58 +12163,14 @@
       </p:sp>
       <p:sp>
         <p:nvSpPr>
-          <p:cNvPr id="3" name="Rectangle 2"/>
-          <p:cNvSpPr/>
-          <p:nvPr/>
-        </p:nvSpPr>
-        <p:spPr>
-          <a:xfrm>
-            <a:off x="0" y="822960"/>
-            <a:ext cx="12191695" cy="45720"/>
-          </a:xfrm>
-          <a:prstGeom prst="rect">
-            <a:avLst/>
-          </a:prstGeom>
-          <a:solidFill>
-            <a:srgbClr val="2F6FED"/>
-          </a:solidFill>
-          <a:ln>
-            <a:noFill/>
-          </a:ln>
-          <a:effectLst/>
-        </p:spPr>
-        <p:style>
-          <a:lnRef idx="1">
-            <a:schemeClr val="accent1"/>
-          </a:lnRef>
-          <a:fillRef idx="3">
-            <a:schemeClr val="accent1"/>
-          </a:fillRef>
-          <a:effectRef idx="2">
-            <a:schemeClr val="accent1"/>
-          </a:effectRef>
-          <a:fontRef idx="minor">
-            <a:schemeClr val="lt1"/>
-          </a:fontRef>
-        </p:style>
-        <p:txBody>
-          <a:bodyPr rtlCol="0" anchor="ctr"/>
-          <a:lstStyle/>
-          <a:p>
-            <a:pPr algn="ctr"/>
-          </a:p>
-        </p:txBody>
-      </p:sp>
-      <p:sp>
-        <p:nvSpPr>
-          <p:cNvPr id="4" name="TextBox 3"/>
+          <p:cNvPr id="3" name="TextBox 2"/>
           <p:cNvSpPr txBox="1"/>
           <p:nvPr/>
         </p:nvSpPr>
         <p:spPr>
           <a:xfrm>
-            <a:off x="548640" y="137160"/>
-            <a:ext cx="8442656" cy="548640"/>
+            <a:off x="548640" y="292608"/>
+            <a:ext cx="7985455" cy="566928"/>
           </a:xfrm>
           <a:prstGeom prst="rect">
             <a:avLst/>
@@ -12249,10 +12192,10 @@
             <a:r>
               <a:rPr sz="2600" b="1" u="none">
                 <a:solidFill>
-                  <a:srgbClr val="FFFFFF"/>
+                  <a:srgbClr val="1F3864"/>
                 </a:solidFill>
                 <a:latin typeface="Times New Roman"/>
-                <a:ea typeface="Noto Sans CJK SC"/>
+                <a:ea typeface="Noto Serif CJK SC"/>
               </a:rPr>
               <a:t>考点一 函数的对称性</a:t>
             </a:r>
@@ -12261,13 +12204,13 @@
       </p:sp>
       <p:sp>
         <p:nvSpPr>
-          <p:cNvPr id="5" name="Rounded Rectangle 4"/>
+          <p:cNvPr id="4" name="Rounded Rectangle 3"/>
           <p:cNvSpPr/>
           <p:nvPr/>
         </p:nvSpPr>
         <p:spPr>
           <a:xfrm>
-            <a:off x="10966399" y="219456"/>
+            <a:off x="10966399" y="384048"/>
             <a:ext cx="676656" cy="365760"/>
           </a:xfrm>
           <a:prstGeom prst="roundRect">
@@ -12276,7 +12219,7 @@
             </a:avLst>
           </a:prstGeom>
           <a:solidFill>
-            <a:srgbClr val="2E4A78"/>
+            <a:srgbClr val="C00000"/>
           </a:solidFill>
           <a:ln>
             <a:noFill/>
@@ -12307,13 +12250,13 @@
       </p:sp>
       <p:sp>
         <p:nvSpPr>
-          <p:cNvPr id="6" name="TextBox 5"/>
+          <p:cNvPr id="5" name="TextBox 4"/>
           <p:cNvSpPr txBox="1"/>
           <p:nvPr/>
         </p:nvSpPr>
         <p:spPr>
           <a:xfrm>
-            <a:off x="10966399" y="237744"/>
+            <a:off x="10966399" y="402336"/>
             <a:ext cx="676656" cy="329184"/>
           </a:xfrm>
           <a:prstGeom prst="rect">
@@ -12339,10 +12282,54 @@
                   <a:srgbClr val="FFFFFF"/>
                 </a:solidFill>
                 <a:latin typeface="Times New Roman"/>
-                <a:ea typeface="Noto Sans CJK SC"/>
+                <a:ea typeface="Noto Serif CJK SC"/>
               </a:rPr>
               <a:t>例题</a:t>
             </a:r>
+          </a:p>
+        </p:txBody>
+      </p:sp>
+      <p:sp>
+        <p:nvSpPr>
+          <p:cNvPr id="6" name="Rectangle 5"/>
+          <p:cNvSpPr/>
+          <p:nvPr/>
+        </p:nvSpPr>
+        <p:spPr>
+          <a:xfrm>
+            <a:off x="548640" y="950976"/>
+            <a:ext cx="11094415" cy="9525"/>
+          </a:xfrm>
+          <a:prstGeom prst="rect">
+            <a:avLst/>
+          </a:prstGeom>
+          <a:solidFill>
+            <a:srgbClr val="D8DEE8"/>
+          </a:solidFill>
+          <a:ln>
+            <a:noFill/>
+          </a:ln>
+          <a:effectLst/>
+        </p:spPr>
+        <p:style>
+          <a:lnRef idx="1">
+            <a:schemeClr val="accent1"/>
+          </a:lnRef>
+          <a:fillRef idx="3">
+            <a:schemeClr val="accent1"/>
+          </a:fillRef>
+          <a:effectRef idx="2">
+            <a:schemeClr val="accent1"/>
+          </a:effectRef>
+          <a:fontRef idx="minor">
+            <a:schemeClr val="lt1"/>
+          </a:fontRef>
+        </p:style>
+        <p:txBody>
+          <a:bodyPr rtlCol="0" anchor="ctr"/>
+          <a:lstStyle/>
+          <a:p>
+            <a:pPr algn="ctr"/>
           </a:p>
         </p:txBody>
       </p:sp>
@@ -12363,7 +12350,7 @@
             </a:avLst>
           </a:prstGeom>
           <a:solidFill>
-            <a:srgbClr val="2F6FED"/>
+            <a:srgbClr val="C00000"/>
           </a:solidFill>
           <a:ln>
             <a:noFill/>
@@ -12426,7 +12413,7 @@
                   <a:srgbClr val="FFFFFF"/>
                 </a:solidFill>
                 <a:latin typeface="Times New Roman"/>
-                <a:ea typeface="Noto Sans CJK SC"/>
+                <a:ea typeface="Noto Serif CJK SC"/>
               </a:rPr>
               <a:t>例1</a:t>
             </a:r>
@@ -12464,10 +12451,10 @@
             <a:r>
               <a:rPr sz="2200" b="0" u="none">
                 <a:solidFill>
-                  <a:srgbClr val="16202E"/>
+                  <a:srgbClr val="1A2233"/>
                 </a:solidFill>
                 <a:latin typeface="Times New Roman"/>
-                <a:ea typeface="Noto Sans CJK SC"/>
+                <a:ea typeface="Noto Serif CJK SC"/>
               </a:rPr>
               <a:t>（2025·保定质检）已知 f(x+1) 是奇函数，f(x) 的图象关于直线 x=-1 对称，则下列结论正确的是（　　）</a:t>
             </a:r>
@@ -12483,7 +12470,7 @@
         <p:spPr>
           <a:xfrm>
             <a:off x="548640" y="3182874"/>
-            <a:ext cx="1920925" cy="548640"/>
+            <a:ext cx="3951579" cy="548640"/>
           </a:xfrm>
           <a:prstGeom prst="rect">
             <a:avLst/>
@@ -12500,25 +12487,25 @@
               <a:lnSpc>
                 <a:spcPct val="125000"/>
               </a:lnSpc>
-              <a:defRPr sz="1900"/>
+              <a:defRPr sz="1800"/>
             </a:pPr>
             <a:r>
-              <a:rPr sz="1900" b="1" u="none">
+              <a:rPr sz="1800" b="1" u="none">
                 <a:solidFill>
                   <a:srgbClr val="2F6FED"/>
                 </a:solidFill>
                 <a:latin typeface="Times New Roman"/>
-                <a:ea typeface="Noto Sans CJK SC"/>
+                <a:ea typeface="Noto Serif CJK SC"/>
               </a:rPr>
               <a:t>A．</a:t>
             </a:r>
             <a:r>
-              <a:rPr sz="1900" b="0" u="none">
+              <a:rPr sz="1800" b="0" u="none">
                 <a:solidFill>
-                  <a:srgbClr val="16202E"/>
+                  <a:srgbClr val="1A2233"/>
                 </a:solidFill>
                 <a:latin typeface="Times New Roman"/>
-                <a:ea typeface="Noto Sans CJK SC"/>
+                <a:ea typeface="Noto Serif CJK SC"/>
               </a:rPr>
               <a:t>f(x) 是偶函数</a:t>
             </a:r>
@@ -12533,8 +12520,8 @@
         </p:nvSpPr>
         <p:spPr>
           <a:xfrm>
-            <a:off x="2579293" y="3182874"/>
-            <a:ext cx="1920925" cy="548640"/>
+            <a:off x="4609947" y="3182874"/>
+            <a:ext cx="3951579" cy="548640"/>
           </a:xfrm>
           <a:prstGeom prst="rect">
             <a:avLst/>
@@ -12551,25 +12538,25 @@
               <a:lnSpc>
                 <a:spcPct val="125000"/>
               </a:lnSpc>
-              <a:defRPr sz="1900"/>
+              <a:defRPr sz="1800"/>
             </a:pPr>
             <a:r>
-              <a:rPr sz="1900" b="1" u="none">
+              <a:rPr sz="1800" b="1" u="none">
                 <a:solidFill>
                   <a:srgbClr val="2F6FED"/>
                 </a:solidFill>
                 <a:latin typeface="Times New Roman"/>
-                <a:ea typeface="Noto Sans CJK SC"/>
+                <a:ea typeface="Noto Serif CJK SC"/>
               </a:rPr>
               <a:t>B．</a:t>
             </a:r>
             <a:r>
-              <a:rPr sz="1900" b="0" u="none">
+              <a:rPr sz="1800" b="0" u="none">
                 <a:solidFill>
-                  <a:srgbClr val="16202E"/>
+                  <a:srgbClr val="1A2233"/>
                 </a:solidFill>
                 <a:latin typeface="Times New Roman"/>
-                <a:ea typeface="Noto Sans CJK SC"/>
+                <a:ea typeface="Noto Serif CJK SC"/>
               </a:rPr>
               <a:t>f(x) 是奇函数</a:t>
             </a:r>
@@ -12584,8 +12571,8 @@
         </p:nvSpPr>
         <p:spPr>
           <a:xfrm>
-            <a:off x="4609947" y="3182874"/>
-            <a:ext cx="1920925" cy="548640"/>
+            <a:off x="548640" y="3777234"/>
+            <a:ext cx="3951579" cy="548640"/>
           </a:xfrm>
           <a:prstGeom prst="rect">
             <a:avLst/>
@@ -12602,25 +12589,25 @@
               <a:lnSpc>
                 <a:spcPct val="125000"/>
               </a:lnSpc>
-              <a:defRPr sz="1900"/>
+              <a:defRPr sz="1800"/>
             </a:pPr>
             <a:r>
-              <a:rPr sz="1900" b="1" u="none">
+              <a:rPr sz="1800" b="1" u="none">
                 <a:solidFill>
                   <a:srgbClr val="2F6FED"/>
                 </a:solidFill>
                 <a:latin typeface="Times New Roman"/>
-                <a:ea typeface="Noto Sans CJK SC"/>
+                <a:ea typeface="Noto Serif CJK SC"/>
               </a:rPr>
               <a:t>C．</a:t>
             </a:r>
             <a:r>
-              <a:rPr sz="1900" b="0" u="none">
+              <a:rPr sz="1800" b="0" u="none">
                 <a:solidFill>
-                  <a:srgbClr val="16202E"/>
+                  <a:srgbClr val="1A2233"/>
                 </a:solidFill>
                 <a:latin typeface="Times New Roman"/>
-                <a:ea typeface="Noto Sans CJK SC"/>
+                <a:ea typeface="Noto Serif CJK SC"/>
               </a:rPr>
               <a:t>f(x) 的周期为 4</a:t>
             </a:r>
@@ -12635,8 +12622,8 @@
         </p:nvSpPr>
         <p:spPr>
           <a:xfrm>
-            <a:off x="6640601" y="3182874"/>
-            <a:ext cx="1920925" cy="548640"/>
+            <a:off x="4609947" y="3777234"/>
+            <a:ext cx="3951579" cy="548640"/>
           </a:xfrm>
           <a:prstGeom prst="rect">
             <a:avLst/>
@@ -12653,25 +12640,25 @@
               <a:lnSpc>
                 <a:spcPct val="125000"/>
               </a:lnSpc>
-              <a:defRPr sz="1900"/>
+              <a:defRPr sz="1800"/>
             </a:pPr>
             <a:r>
-              <a:rPr sz="1900" b="1" u="none">
+              <a:rPr sz="1800" b="1" u="none">
                 <a:solidFill>
                   <a:srgbClr val="2F6FED"/>
                 </a:solidFill>
                 <a:latin typeface="Times New Roman"/>
-                <a:ea typeface="Noto Sans CJK SC"/>
+                <a:ea typeface="Noto Serif CJK SC"/>
               </a:rPr>
               <a:t>D．</a:t>
             </a:r>
             <a:r>
-              <a:rPr sz="1900" b="0" u="none">
+              <a:rPr sz="1800" b="0" u="none">
                 <a:solidFill>
-                  <a:srgbClr val="16202E"/>
+                  <a:srgbClr val="1A2233"/>
                 </a:solidFill>
                 <a:latin typeface="Times New Roman"/>
-                <a:ea typeface="Noto Sans CJK SC"/>
+                <a:ea typeface="Noto Serif CJK SC"/>
               </a:rPr>
               <a:t>f(2026)=0</a:t>
             </a:r>
@@ -12687,7 +12674,7 @@
         <p:spPr>
           <a:xfrm>
             <a:off x="8899855" y="1536192"/>
-            <a:ext cx="2743200" cy="4572000"/>
+            <a:ext cx="2743200" cy="1335024"/>
           </a:xfrm>
           <a:prstGeom prst="roundRect">
             <a:avLst>
@@ -12735,13 +12722,13 @@
         <p:spPr>
           <a:xfrm>
             <a:off x="8899855" y="1536192"/>
-            <a:ext cx="64008" cy="4572000"/>
-          </a:xfrm>
-          <a:prstGeom prst="rect">
-            <a:avLst/>
-          </a:prstGeom>
-          <a:solidFill>
-            <a:srgbClr val="C2410C"/>
+            <a:ext cx="64008" cy="1335024"/>
+          </a:xfrm>
+          <a:prstGeom prst="rect">
+            <a:avLst/>
+          </a:prstGeom>
+          <a:solidFill>
+            <a:srgbClr val="C00000"/>
           </a:solidFill>
           <a:ln>
             <a:noFill/>
@@ -12779,7 +12766,7 @@
         <p:spPr>
           <a:xfrm>
             <a:off x="9082735" y="1645920"/>
-            <a:ext cx="2414016" cy="4389120"/>
+            <a:ext cx="2414016" cy="1152144"/>
           </a:xfrm>
           <a:prstGeom prst="rect">
             <a:avLst/>
@@ -12794,17 +12781,17 @@
           <a:p>
             <a:pPr algn="l">
               <a:lnSpc>
-                <a:spcPct val="145000"/>
+                <a:spcPct val="132000"/>
               </a:lnSpc>
-              <a:defRPr sz="1400"/>
+              <a:defRPr sz="1300"/>
             </a:pPr>
             <a:r>
-              <a:rPr sz="1400" b="1" u="none">
+              <a:rPr sz="1300" b="1" u="none">
                 <a:solidFill>
-                  <a:srgbClr val="C2410C"/>
+                  <a:srgbClr val="C00000"/>
                 </a:solidFill>
                 <a:latin typeface="Times New Roman"/>
-                <a:ea typeface="Noto Sans CJK SC"/>
+                <a:ea typeface="Noto Serif CJK SC"/>
               </a:rPr>
               <a:t>判定要点</a:t>
             </a:r>
@@ -12815,26 +12802,26 @@
                 <a:spcPct val="135000"/>
               </a:lnSpc>
               <a:spcBef>
-                <a:spcPts val="600"/>
+                <a:spcPts val="400"/>
               </a:spcBef>
             </a:pPr>
             <a:r>
-              <a:rPr sz="1300" b="1" u="none">
+              <a:rPr sz="1200" b="1" u="none">
                 <a:solidFill>
-                  <a:srgbClr val="C2410C"/>
+                  <a:srgbClr val="C00000"/>
                 </a:solidFill>
                 <a:latin typeface="Times New Roman"/>
-                <a:ea typeface="Noto Sans CJK SC"/>
+                <a:ea typeface="Noto Serif CJK SC"/>
               </a:rPr>
               <a:t>1. </a:t>
             </a:r>
             <a:r>
-              <a:rPr sz="1300" b="0" u="none">
+              <a:rPr sz="1200" b="0" u="none">
                 <a:solidFill>
                   <a:srgbClr val="6B2B2B"/>
                 </a:solidFill>
                 <a:latin typeface="Times New Roman"/>
-                <a:ea typeface="Noto Sans CJK SC"/>
+                <a:ea typeface="Noto Serif CJK SC"/>
               </a:rPr>
               <a:t>对称轴与对称中心「一轴一心」⇒ 周期 T=4|a-b|；</a:t>
             </a:r>
@@ -12845,26 +12832,26 @@
                 <a:spcPct val="135000"/>
               </a:lnSpc>
               <a:spcBef>
-                <a:spcPts val="600"/>
+                <a:spcPts val="400"/>
               </a:spcBef>
             </a:pPr>
             <a:r>
-              <a:rPr sz="1300" b="1" u="none">
+              <a:rPr sz="1200" b="1" u="none">
                 <a:solidFill>
-                  <a:srgbClr val="C2410C"/>
+                  <a:srgbClr val="C00000"/>
                 </a:solidFill>
                 <a:latin typeface="Times New Roman"/>
-                <a:ea typeface="Noto Sans CJK SC"/>
+                <a:ea typeface="Noto Serif CJK SC"/>
               </a:rPr>
               <a:t>2. </a:t>
             </a:r>
             <a:r>
-              <a:rPr sz="1300" b="0" u="none">
+              <a:rPr sz="1200" b="0" u="none">
                 <a:solidFill>
                   <a:srgbClr val="6B2B2B"/>
                 </a:solidFill>
                 <a:latin typeface="Times New Roman"/>
-                <a:ea typeface="Noto Sans CJK SC"/>
+                <a:ea typeface="Noto Serif CJK SC"/>
               </a:rPr>
               <a:t>「两轴」⇒ T=2|a-b|。</a:t>
             </a:r>
@@ -12924,7 +12911,7 @@
         <p:spPr>
           <a:xfrm>
             <a:off x="548640" y="6345936"/>
-            <a:ext cx="8595360" cy="274320"/>
+            <a:ext cx="7498079" cy="274320"/>
           </a:xfrm>
           <a:prstGeom prst="rect">
             <a:avLst/>
@@ -12949,7 +12936,7 @@
                   <a:srgbClr val="8A94A6"/>
                 </a:solidFill>
                 <a:latin typeface="Times New Roman"/>
-                <a:ea typeface="Noto Sans CJK SC"/>
+                <a:ea typeface="Noto Serif CJK SC"/>
               </a:rPr>
               <a:t>胶州四中 · 第4节 函数的对称性及应用</a:t>
             </a:r>
@@ -12990,7 +12977,7 @@
                   <a:srgbClr val="8A94A6"/>
                 </a:solidFill>
                 <a:latin typeface="Times New Roman"/>
-                <a:ea typeface="Noto Sans CJK SC"/>
+                <a:ea typeface="Noto Serif CJK SC"/>
               </a:rPr>
               <a:t>9</a:t>
             </a:r>
